--- a/Meridian-Investor-Deck.pptx
+++ b/Meridian-Investor-Deck.pptx
@@ -4,21 +4,24 @@
   <p:sldMasterIdLst>
     <p:sldMasterId id="2147483648" r:id="rId1"/>
   </p:sldMasterIdLst>
+  <p:notesMasterIdLst>
+    <p:notesMasterId r:id="rId14"/>
+  </p:notesMasterIdLst>
   <p:sldIdLst>
-    <p:sldId id="256" r:id="rId7"/>
-    <p:sldId id="257" r:id="rId8"/>
-    <p:sldId id="258" r:id="rId9"/>
-    <p:sldId id="259" r:id="rId10"/>
-    <p:sldId id="260" r:id="rId11"/>
-    <p:sldId id="261" r:id="rId12"/>
-    <p:sldId id="262" r:id="rId13"/>
-    <p:sldId id="263" r:id="rId14"/>
-    <p:sldId id="264" r:id="rId15"/>
-    <p:sldId id="265" r:id="rId16"/>
-    <p:sldId id="266" r:id="rId17"/>
-    <p:sldId id="267" r:id="rId18"/>
+    <p:sldId id="256" r:id="rId2"/>
+    <p:sldId id="257" r:id="rId3"/>
+    <p:sldId id="258" r:id="rId4"/>
+    <p:sldId id="259" r:id="rId5"/>
+    <p:sldId id="260" r:id="rId6"/>
+    <p:sldId id="261" r:id="rId7"/>
+    <p:sldId id="262" r:id="rId8"/>
+    <p:sldId id="263" r:id="rId9"/>
+    <p:sldId id="264" r:id="rId10"/>
+    <p:sldId id="265" r:id="rId11"/>
+    <p:sldId id="266" r:id="rId12"/>
+    <p:sldId id="267" r:id="rId13"/>
   </p:sldIdLst>
-  <p:sldSz cx="12191695" cy="6858000" type="screen4x3"/>
+  <p:sldSz cx="12192000" cy="6858000"/>
   <p:notesSz cx="6858000" cy="9144000"/>
   <p:defaultTextStyle>
     <a:defPPr>
@@ -115,11 +118,27 @@
       </a:defRPr>
     </a:lvl9pPr>
   </p:defaultTextStyle>
+  <p:extLst>
+    <p:ext uri="{EFAFB233-063F-42B5-8137-9DF3F51BA10A}">
+      <p15:sldGuideLst xmlns:p15="http://schemas.microsoft.com/office/powerpoint/2012/main">
+        <p15:guide id="1" orient="horz" pos="2160">
+          <p15:clr>
+            <a:srgbClr val="A4A3A4"/>
+          </p15:clr>
+        </p15:guide>
+        <p15:guide id="2" pos="2880">
+          <p15:clr>
+            <a:srgbClr val="A4A3A4"/>
+          </p15:clr>
+        </p15:guide>
+      </p15:sldGuideLst>
+    </p:ext>
+  </p:extLst>
 </p:presentation>
 </file>
 
 <file path=ppt/notesMasters/notesMaster1.xml><?xml version="1.0" encoding="utf-8"?>
-<p:notesMaster xmlns:a="http://schemas.openxmlformats.org/drawingml/2006/main" xmlns:p="http://schemas.openxmlformats.org/presentationml/2006/main" xmlns:r="http://schemas.openxmlformats.org/officeDocument/2006/relationships">
+<p:notesMaster xmlns:a="http://schemas.openxmlformats.org/drawingml/2006/main" xmlns:r="http://schemas.openxmlformats.org/officeDocument/2006/relationships" xmlns:p="http://schemas.openxmlformats.org/presentationml/2006/main">
   <p:cSld>
     <p:bg>
       <p:bgRef idx="1001">
@@ -140,241 +159,16 @@
           <a:chExt cx="0" cy="0"/>
         </a:xfrm>
       </p:grpSpPr>
-      <p:sp>
-        <p:nvSpPr>
-          <p:cNvPr id="2" name="Header Placeholder 1"/>
-          <p:cNvSpPr>
-            <a:spLocks noGrp="1"/>
-          </p:cNvSpPr>
-          <p:nvPr>
-            <p:ph type="hdr" sz="quarter"/>
-          </p:nvPr>
-        </p:nvSpPr>
-        <p:spPr>
-          <a:xfrm>
-            <a:off x="0" y="0"/>
-            <a:ext cx="2971800" cy="457200"/>
-          </a:xfrm>
-          <a:prstGeom prst="rect">
-            <a:avLst/>
-          </a:prstGeom>
-        </p:spPr>
-        <p:txBody>
-          <a:bodyPr vert="horz" lIns="91440" tIns="45720" rIns="91440" bIns="45720" rtlCol="0"/>
-          <a:lstStyle>
-            <a:lvl1pPr algn="l">
-              <a:defRPr sz="1200"/>
-            </a:lvl1pPr>
-          </a:lstStyle>
-          <a:p>
-            <a:endParaRPr lang="en-US"/>
-          </a:p>
-        </p:txBody>
-      </p:sp>
-      <p:sp>
-        <p:nvSpPr>
-          <p:cNvPr id="3" name="Date Placeholder 2"/>
-          <p:cNvSpPr>
-            <a:spLocks noGrp="1"/>
-          </p:cNvSpPr>
-          <p:nvPr>
-            <p:ph type="dt" idx="1"/>
-          </p:nvPr>
-        </p:nvSpPr>
-        <p:spPr>
-          <a:xfrm>
-            <a:off x="3884613" y="0"/>
-            <a:ext cx="2971800" cy="457200"/>
-          </a:xfrm>
-          <a:prstGeom prst="rect">
-            <a:avLst/>
-          </a:prstGeom>
-        </p:spPr>
-        <p:txBody>
-          <a:bodyPr vert="horz" lIns="91440" tIns="45720" rIns="91440" bIns="45720" rtlCol="0"/>
-          <a:lstStyle>
-            <a:lvl1pPr algn="r">
-              <a:defRPr sz="1200"/>
-            </a:lvl1pPr>
-          </a:lstStyle>
-          <a:p>
-            <a:fld id="{0F89C1C7-3DCD-1040-A9CF-14679D8B5DDD}" type="datetimeFigureOut">
-              <a:rPr lang="en-US" smtClean="0"/>
-              <a:t>10/17/16</a:t>
-            </a:fld>
-            <a:endParaRPr lang="en-US"/>
-          </a:p>
-        </p:txBody>
-      </p:sp>
-      <p:sp>
-        <p:nvSpPr>
-          <p:cNvPr id="4" name="Slide Image Placeholder 3"/>
-          <p:cNvSpPr>
-            <a:spLocks noGrp="1" noRot="1" noChangeAspect="1"/>
-          </p:cNvSpPr>
-          <p:nvPr>
-            <p:ph type="sldImg" idx="2"/>
-          </p:nvPr>
-        </p:nvSpPr>
-        <p:spPr>
-          <a:xfrm>
-            <a:off x="1143000" y="685800"/>
-            <a:ext cx="4572000" cy="3429000"/>
-          </a:xfrm>
-          <a:prstGeom prst="rect">
-            <a:avLst/>
-          </a:prstGeom>
-          <a:noFill/>
-          <a:ln w="12700">
-            <a:solidFill>
-              <a:prstClr val="black"/>
-            </a:solidFill>
-          </a:ln>
-        </p:spPr>
-        <p:txBody>
-          <a:bodyPr vert="horz" lIns="91440" tIns="45720" rIns="91440" bIns="45720" rtlCol="0" anchor="ctr"/>
-          <a:lstStyle/>
-          <a:p>
-            <a:endParaRPr lang="en-US"/>
-          </a:p>
-        </p:txBody>
-      </p:sp>
-      <p:sp>
-        <p:nvSpPr>
-          <p:cNvPr id="5" name="Notes Placeholder 4"/>
-          <p:cNvSpPr>
-            <a:spLocks noGrp="1"/>
-          </p:cNvSpPr>
-          <p:nvPr>
-            <p:ph type="body" sz="quarter" idx="3"/>
-          </p:nvPr>
-        </p:nvSpPr>
-        <p:spPr>
-          <a:xfrm>
-            <a:off x="685800" y="4343400"/>
-            <a:ext cx="5486400" cy="4114800"/>
-          </a:xfrm>
-          <a:prstGeom prst="rect">
-            <a:avLst/>
-          </a:prstGeom>
-        </p:spPr>
-        <p:txBody>
-          <a:bodyPr vert="horz" lIns="91440" tIns="45720" rIns="91440" bIns="45720" rtlCol="0"/>
-          <a:lstStyle/>
-          <a:p>
-            <a:pPr lvl="0"/>
-            <a:r>
-              <a:rPr lang="en-US" smtClean="0"/>
-              <a:t>Click to edit Master text styles</a:t>
-            </a:r>
-          </a:p>
-          <a:p>
-            <a:pPr lvl="1"/>
-            <a:r>
-              <a:rPr lang="en-US" smtClean="0"/>
-              <a:t>Second level</a:t>
-            </a:r>
-          </a:p>
-          <a:p>
-            <a:pPr lvl="2"/>
-            <a:r>
-              <a:rPr lang="en-US" smtClean="0"/>
-              <a:t>Third level</a:t>
-            </a:r>
-          </a:p>
-          <a:p>
-            <a:pPr lvl="3"/>
-            <a:r>
-              <a:rPr lang="en-US" smtClean="0"/>
-              <a:t>Fourth level</a:t>
-            </a:r>
-          </a:p>
-          <a:p>
-            <a:pPr lvl="4"/>
-            <a:r>
-              <a:rPr lang="en-US" smtClean="0"/>
-              <a:t>Fifth level</a:t>
-            </a:r>
-            <a:endParaRPr lang="en-US"/>
-          </a:p>
-        </p:txBody>
-      </p:sp>
-      <p:sp>
-        <p:nvSpPr>
-          <p:cNvPr id="6" name="Footer Placeholder 5"/>
-          <p:cNvSpPr>
-            <a:spLocks noGrp="1"/>
-          </p:cNvSpPr>
-          <p:nvPr>
-            <p:ph type="ftr" sz="quarter" idx="4"/>
-          </p:nvPr>
-        </p:nvSpPr>
-        <p:spPr>
-          <a:xfrm>
-            <a:off x="0" y="8685213"/>
-            <a:ext cx="2971800" cy="457200"/>
-          </a:xfrm>
-          <a:prstGeom prst="rect">
-            <a:avLst/>
-          </a:prstGeom>
-        </p:spPr>
-        <p:txBody>
-          <a:bodyPr vert="horz" lIns="91440" tIns="45720" rIns="91440" bIns="45720" rtlCol="0" anchor="b"/>
-          <a:lstStyle>
-            <a:lvl1pPr algn="l">
-              <a:defRPr sz="1200"/>
-            </a:lvl1pPr>
-          </a:lstStyle>
-          <a:p>
-            <a:endParaRPr lang="en-US"/>
-          </a:p>
-        </p:txBody>
-      </p:sp>
-      <p:sp>
-        <p:nvSpPr>
-          <p:cNvPr id="7" name="Slide Number Placeholder 6"/>
-          <p:cNvSpPr>
-            <a:spLocks noGrp="1"/>
-          </p:cNvSpPr>
-          <p:nvPr>
-            <p:ph type="sldNum" sz="quarter" idx="5"/>
-          </p:nvPr>
-        </p:nvSpPr>
-        <p:spPr>
-          <a:xfrm>
-            <a:off x="3884613" y="8685213"/>
-            <a:ext cx="2971800" cy="457200"/>
-          </a:xfrm>
-          <a:prstGeom prst="rect">
-            <a:avLst/>
-          </a:prstGeom>
-        </p:spPr>
-        <p:txBody>
-          <a:bodyPr vert="horz" lIns="91440" tIns="45720" rIns="91440" bIns="45720" rtlCol="0" anchor="b"/>
-          <a:lstStyle>
-            <a:lvl1pPr algn="r">
-              <a:defRPr sz="1200"/>
-            </a:lvl1pPr>
-          </a:lstStyle>
-          <a:p>
-            <a:fld id="{BB5E49A5-4136-284D-997B-48E1D791AD67}" type="slidenum">
-              <a:rPr lang="en-US" smtClean="0"/>
-              <a:t>‹#›</a:t>
-            </a:fld>
-            <a:endParaRPr lang="en-US"/>
-          </a:p>
-        </p:txBody>
-      </p:sp>
     </p:spTree>
     <p:extLst>
       <p:ext uri="{BB962C8B-B14F-4D97-AF65-F5344CB8AC3E}">
-        <p14:creationId xmlns:p14="http://schemas.microsoft.com/office/powerpoint/2010/main" val="2623252185"/>
+        <p14:creationId xmlns:p14="http://schemas.microsoft.com/office/powerpoint/2010/main" val="3944578176"/>
       </p:ext>
     </p:extLst>
   </p:cSld>
   <p:clrMap bg1="lt1" tx1="dk1" bg2="lt2" tx2="dk2" accent1="accent1" accent2="accent2" accent3="accent3" accent4="accent4" accent5="accent5" accent6="accent6" hlink="hlink" folHlink="folHlink"/>
   <p:notesStyle>
-    <a:lvl1pPr marL="0" algn="l" defTabSz="457200" rtl="0" eaLnBrk="1" latinLnBrk="0" hangingPunct="1">
+    <a:lvl1pPr marL="0" algn="l" defTabSz="914400" rtl="0" eaLnBrk="1" latinLnBrk="0" hangingPunct="1">
       <a:defRPr sz="1200" kern="1200">
         <a:solidFill>
           <a:schemeClr val="tx1"/>
@@ -384,7 +178,7 @@
         <a:cs typeface="+mn-cs"/>
       </a:defRPr>
     </a:lvl1pPr>
-    <a:lvl2pPr marL="457200" algn="l" defTabSz="457200" rtl="0" eaLnBrk="1" latinLnBrk="0" hangingPunct="1">
+    <a:lvl2pPr marL="457200" algn="l" defTabSz="914400" rtl="0" eaLnBrk="1" latinLnBrk="0" hangingPunct="1">
       <a:defRPr sz="1200" kern="1200">
         <a:solidFill>
           <a:schemeClr val="tx1"/>
@@ -394,7 +188,7 @@
         <a:cs typeface="+mn-cs"/>
       </a:defRPr>
     </a:lvl2pPr>
-    <a:lvl3pPr marL="914400" algn="l" defTabSz="457200" rtl="0" eaLnBrk="1" latinLnBrk="0" hangingPunct="1">
+    <a:lvl3pPr marL="914400" algn="l" defTabSz="914400" rtl="0" eaLnBrk="1" latinLnBrk="0" hangingPunct="1">
       <a:defRPr sz="1200" kern="1200">
         <a:solidFill>
           <a:schemeClr val="tx1"/>
@@ -404,7 +198,7 @@
         <a:cs typeface="+mn-cs"/>
       </a:defRPr>
     </a:lvl3pPr>
-    <a:lvl4pPr marL="1371600" algn="l" defTabSz="457200" rtl="0" eaLnBrk="1" latinLnBrk="0" hangingPunct="1">
+    <a:lvl4pPr marL="1371600" algn="l" defTabSz="914400" rtl="0" eaLnBrk="1" latinLnBrk="0" hangingPunct="1">
       <a:defRPr sz="1200" kern="1200">
         <a:solidFill>
           <a:schemeClr val="tx1"/>
@@ -414,7 +208,7 @@
         <a:cs typeface="+mn-cs"/>
       </a:defRPr>
     </a:lvl4pPr>
-    <a:lvl5pPr marL="1828800" algn="l" defTabSz="457200" rtl="0" eaLnBrk="1" latinLnBrk="0" hangingPunct="1">
+    <a:lvl5pPr marL="1828800" algn="l" defTabSz="914400" rtl="0" eaLnBrk="1" latinLnBrk="0" hangingPunct="1">
       <a:defRPr sz="1200" kern="1200">
         <a:solidFill>
           <a:schemeClr val="tx1"/>
@@ -424,7 +218,7 @@
         <a:cs typeface="+mn-cs"/>
       </a:defRPr>
     </a:lvl5pPr>
-    <a:lvl6pPr marL="2286000" algn="l" defTabSz="457200" rtl="0" eaLnBrk="1" latinLnBrk="0" hangingPunct="1">
+    <a:lvl6pPr marL="2286000" algn="l" defTabSz="914400" rtl="0" eaLnBrk="1" latinLnBrk="0" hangingPunct="1">
       <a:defRPr sz="1200" kern="1200">
         <a:solidFill>
           <a:schemeClr val="tx1"/>
@@ -434,7 +228,7 @@
         <a:cs typeface="+mn-cs"/>
       </a:defRPr>
     </a:lvl6pPr>
-    <a:lvl7pPr marL="2743200" algn="l" defTabSz="457200" rtl="0" eaLnBrk="1" latinLnBrk="0" hangingPunct="1">
+    <a:lvl7pPr marL="2743200" algn="l" defTabSz="914400" rtl="0" eaLnBrk="1" latinLnBrk="0" hangingPunct="1">
       <a:defRPr sz="1200" kern="1200">
         <a:solidFill>
           <a:schemeClr val="tx1"/>
@@ -444,7 +238,7 @@
         <a:cs typeface="+mn-cs"/>
       </a:defRPr>
     </a:lvl7pPr>
-    <a:lvl8pPr marL="3200400" algn="l" defTabSz="457200" rtl="0" eaLnBrk="1" latinLnBrk="0" hangingPunct="1">
+    <a:lvl8pPr marL="3200400" algn="l" defTabSz="914400" rtl="0" eaLnBrk="1" latinLnBrk="0" hangingPunct="1">
       <a:defRPr sz="1200" kern="1200">
         <a:solidFill>
           <a:schemeClr val="tx1"/>
@@ -454,7 +248,7 @@
         <a:cs typeface="+mn-cs"/>
       </a:defRPr>
     </a:lvl8pPr>
-    <a:lvl9pPr marL="3657600" algn="l" defTabSz="457200" rtl="0" eaLnBrk="1" latinLnBrk="0" hangingPunct="1">
+    <a:lvl9pPr marL="3657600" algn="l" defTabSz="914400" rtl="0" eaLnBrk="1" latinLnBrk="0" hangingPunct="1">
       <a:defRPr sz="1200" kern="1200">
         <a:solidFill>
           <a:schemeClr val="tx1"/>
@@ -469,7 +263,7 @@
 </file>
 
 <file path=ppt/notesSlides/notesSlide1.xml><?xml version="1.0" encoding="utf-8"?>
-<p:notes xmlns:a="http://schemas.openxmlformats.org/drawingml/2006/main" xmlns:p="http://schemas.openxmlformats.org/presentationml/2006/main" xmlns:r="http://schemas.openxmlformats.org/officeDocument/2006/relationships">
+<p:notes xmlns:a="http://schemas.openxmlformats.org/drawingml/2006/main" xmlns:r="http://schemas.openxmlformats.org/officeDocument/2006/relationships" xmlns:p="http://schemas.openxmlformats.org/presentationml/2006/main">
   <p:cSld>
     <p:spTree>
       <p:nvGrpSpPr>
@@ -489,7 +283,7 @@
         <p:nvSpPr>
           <p:cNvPr id="2" name="Slide Image Placeholder 1"/>
           <p:cNvSpPr>
-            <a:spLocks noGrp="1"/>
+            <a:spLocks noGrp="1" noRot="1" noChangeAspect="1"/>
           </p:cNvSpPr>
           <p:nvPr>
             <p:ph type="sldImg" idx="2"/>
@@ -504,7 +298,7 @@
             <a:spLocks noGrp="1"/>
           </p:cNvSpPr>
           <p:nvPr>
-            <p:ph type="body" idx="3" sz="quarter"/>
+            <p:ph type="body" sz="quarter" idx="3"/>
           </p:nvPr>
         </p:nvSpPr>
         <p:spPr/>
@@ -525,7 +319,7 @@
             <a:spLocks noGrp="1"/>
           </p:cNvSpPr>
           <p:nvPr>
-            <p:ph type="sldNum" idx="5" sz="quarter"/>
+            <p:ph type="sldNum" sz="quarter" idx="5"/>
           </p:nvPr>
         </p:nvSpPr>
         <p:spPr/>
@@ -539,7 +333,7 @@
 </file>
 
 <file path=ppt/notesSlides/notesSlide10.xml><?xml version="1.0" encoding="utf-8"?>
-<p:notes xmlns:a="http://schemas.openxmlformats.org/drawingml/2006/main" xmlns:p="http://schemas.openxmlformats.org/presentationml/2006/main" xmlns:r="http://schemas.openxmlformats.org/officeDocument/2006/relationships">
+<p:notes xmlns:a="http://schemas.openxmlformats.org/drawingml/2006/main" xmlns:r="http://schemas.openxmlformats.org/officeDocument/2006/relationships" xmlns:p="http://schemas.openxmlformats.org/presentationml/2006/main">
   <p:cSld>
     <p:spTree>
       <p:nvGrpSpPr>
@@ -559,7 +353,7 @@
         <p:nvSpPr>
           <p:cNvPr id="2" name="Slide Image Placeholder 1"/>
           <p:cNvSpPr>
-            <a:spLocks noGrp="1"/>
+            <a:spLocks noGrp="1" noRot="1" noChangeAspect="1"/>
           </p:cNvSpPr>
           <p:nvPr>
             <p:ph type="sldImg" idx="2"/>
@@ -574,7 +368,7 @@
             <a:spLocks noGrp="1"/>
           </p:cNvSpPr>
           <p:nvPr>
-            <p:ph type="body" idx="3" sz="quarter"/>
+            <p:ph type="body" sz="quarter" idx="3"/>
           </p:nvPr>
         </p:nvSpPr>
         <p:spPr/>
@@ -595,7 +389,7 @@
             <a:spLocks noGrp="1"/>
           </p:cNvSpPr>
           <p:nvPr>
-            <p:ph type="sldNum" idx="5" sz="quarter"/>
+            <p:ph type="sldNum" sz="quarter" idx="5"/>
           </p:nvPr>
         </p:nvSpPr>
         <p:spPr/>
@@ -609,7 +403,7 @@
 </file>
 
 <file path=ppt/notesSlides/notesSlide11.xml><?xml version="1.0" encoding="utf-8"?>
-<p:notes xmlns:a="http://schemas.openxmlformats.org/drawingml/2006/main" xmlns:p="http://schemas.openxmlformats.org/presentationml/2006/main" xmlns:r="http://schemas.openxmlformats.org/officeDocument/2006/relationships">
+<p:notes xmlns:a="http://schemas.openxmlformats.org/drawingml/2006/main" xmlns:r="http://schemas.openxmlformats.org/officeDocument/2006/relationships" xmlns:p="http://schemas.openxmlformats.org/presentationml/2006/main">
   <p:cSld>
     <p:spTree>
       <p:nvGrpSpPr>
@@ -629,7 +423,7 @@
         <p:nvSpPr>
           <p:cNvPr id="2" name="Slide Image Placeholder 1"/>
           <p:cNvSpPr>
-            <a:spLocks noGrp="1"/>
+            <a:spLocks noGrp="1" noRot="1" noChangeAspect="1"/>
           </p:cNvSpPr>
           <p:nvPr>
             <p:ph type="sldImg" idx="2"/>
@@ -644,7 +438,7 @@
             <a:spLocks noGrp="1"/>
           </p:cNvSpPr>
           <p:nvPr>
-            <p:ph type="body" idx="3" sz="quarter"/>
+            <p:ph type="body" sz="quarter" idx="3"/>
           </p:nvPr>
         </p:nvSpPr>
         <p:spPr/>
@@ -665,7 +459,7 @@
             <a:spLocks noGrp="1"/>
           </p:cNvSpPr>
           <p:nvPr>
-            <p:ph type="sldNum" idx="5" sz="quarter"/>
+            <p:ph type="sldNum" sz="quarter" idx="5"/>
           </p:nvPr>
         </p:nvSpPr>
         <p:spPr/>
@@ -679,7 +473,7 @@
 </file>
 
 <file path=ppt/notesSlides/notesSlide12.xml><?xml version="1.0" encoding="utf-8"?>
-<p:notes xmlns:a="http://schemas.openxmlformats.org/drawingml/2006/main" xmlns:p="http://schemas.openxmlformats.org/presentationml/2006/main" xmlns:r="http://schemas.openxmlformats.org/officeDocument/2006/relationships">
+<p:notes xmlns:a="http://schemas.openxmlformats.org/drawingml/2006/main" xmlns:r="http://schemas.openxmlformats.org/officeDocument/2006/relationships" xmlns:p="http://schemas.openxmlformats.org/presentationml/2006/main">
   <p:cSld>
     <p:spTree>
       <p:nvGrpSpPr>
@@ -699,7 +493,7 @@
         <p:nvSpPr>
           <p:cNvPr id="2" name="Slide Image Placeholder 1"/>
           <p:cNvSpPr>
-            <a:spLocks noGrp="1"/>
+            <a:spLocks noGrp="1" noRot="1" noChangeAspect="1"/>
           </p:cNvSpPr>
           <p:nvPr>
             <p:ph type="sldImg" idx="2"/>
@@ -714,7 +508,7 @@
             <a:spLocks noGrp="1"/>
           </p:cNvSpPr>
           <p:nvPr>
-            <p:ph type="body" idx="3" sz="quarter"/>
+            <p:ph type="body" sz="quarter" idx="3"/>
           </p:nvPr>
         </p:nvSpPr>
         <p:spPr/>
@@ -735,7 +529,7 @@
             <a:spLocks noGrp="1"/>
           </p:cNvSpPr>
           <p:nvPr>
-            <p:ph type="sldNum" idx="5" sz="quarter"/>
+            <p:ph type="sldNum" sz="quarter" idx="5"/>
           </p:nvPr>
         </p:nvSpPr>
         <p:spPr/>
@@ -749,7 +543,7 @@
 </file>
 
 <file path=ppt/notesSlides/notesSlide2.xml><?xml version="1.0" encoding="utf-8"?>
-<p:notes xmlns:a="http://schemas.openxmlformats.org/drawingml/2006/main" xmlns:p="http://schemas.openxmlformats.org/presentationml/2006/main" xmlns:r="http://schemas.openxmlformats.org/officeDocument/2006/relationships">
+<p:notes xmlns:a="http://schemas.openxmlformats.org/drawingml/2006/main" xmlns:r="http://schemas.openxmlformats.org/officeDocument/2006/relationships" xmlns:p="http://schemas.openxmlformats.org/presentationml/2006/main">
   <p:cSld>
     <p:spTree>
       <p:nvGrpSpPr>
@@ -769,7 +563,7 @@
         <p:nvSpPr>
           <p:cNvPr id="2" name="Slide Image Placeholder 1"/>
           <p:cNvSpPr>
-            <a:spLocks noGrp="1"/>
+            <a:spLocks noGrp="1" noRot="1" noChangeAspect="1"/>
           </p:cNvSpPr>
           <p:nvPr>
             <p:ph type="sldImg" idx="2"/>
@@ -784,7 +578,7 @@
             <a:spLocks noGrp="1"/>
           </p:cNvSpPr>
           <p:nvPr>
-            <p:ph type="body" idx="3" sz="quarter"/>
+            <p:ph type="body" sz="quarter" idx="3"/>
           </p:nvPr>
         </p:nvSpPr>
         <p:spPr/>
@@ -805,7 +599,7 @@
             <a:spLocks noGrp="1"/>
           </p:cNvSpPr>
           <p:nvPr>
-            <p:ph type="sldNum" idx="5" sz="quarter"/>
+            <p:ph type="sldNum" sz="quarter" idx="5"/>
           </p:nvPr>
         </p:nvSpPr>
         <p:spPr/>
@@ -819,7 +613,7 @@
 </file>
 
 <file path=ppt/notesSlides/notesSlide3.xml><?xml version="1.0" encoding="utf-8"?>
-<p:notes xmlns:a="http://schemas.openxmlformats.org/drawingml/2006/main" xmlns:p="http://schemas.openxmlformats.org/presentationml/2006/main" xmlns:r="http://schemas.openxmlformats.org/officeDocument/2006/relationships">
+<p:notes xmlns:a="http://schemas.openxmlformats.org/drawingml/2006/main" xmlns:r="http://schemas.openxmlformats.org/officeDocument/2006/relationships" xmlns:p="http://schemas.openxmlformats.org/presentationml/2006/main">
   <p:cSld>
     <p:spTree>
       <p:nvGrpSpPr>
@@ -839,7 +633,7 @@
         <p:nvSpPr>
           <p:cNvPr id="2" name="Slide Image Placeholder 1"/>
           <p:cNvSpPr>
-            <a:spLocks noGrp="1"/>
+            <a:spLocks noGrp="1" noRot="1" noChangeAspect="1"/>
           </p:cNvSpPr>
           <p:nvPr>
             <p:ph type="sldImg" idx="2"/>
@@ -854,7 +648,7 @@
             <a:spLocks noGrp="1"/>
           </p:cNvSpPr>
           <p:nvPr>
-            <p:ph type="body" idx="3" sz="quarter"/>
+            <p:ph type="body" sz="quarter" idx="3"/>
           </p:nvPr>
         </p:nvSpPr>
         <p:spPr/>
@@ -875,7 +669,7 @@
             <a:spLocks noGrp="1"/>
           </p:cNvSpPr>
           <p:nvPr>
-            <p:ph type="sldNum" idx="5" sz="quarter"/>
+            <p:ph type="sldNum" sz="quarter" idx="5"/>
           </p:nvPr>
         </p:nvSpPr>
         <p:spPr/>
@@ -889,7 +683,7 @@
 </file>
 
 <file path=ppt/notesSlides/notesSlide4.xml><?xml version="1.0" encoding="utf-8"?>
-<p:notes xmlns:a="http://schemas.openxmlformats.org/drawingml/2006/main" xmlns:p="http://schemas.openxmlformats.org/presentationml/2006/main" xmlns:r="http://schemas.openxmlformats.org/officeDocument/2006/relationships">
+<p:notes xmlns:a="http://schemas.openxmlformats.org/drawingml/2006/main" xmlns:r="http://schemas.openxmlformats.org/officeDocument/2006/relationships" xmlns:p="http://schemas.openxmlformats.org/presentationml/2006/main">
   <p:cSld>
     <p:spTree>
       <p:nvGrpSpPr>
@@ -909,7 +703,7 @@
         <p:nvSpPr>
           <p:cNvPr id="2" name="Slide Image Placeholder 1"/>
           <p:cNvSpPr>
-            <a:spLocks noGrp="1"/>
+            <a:spLocks noGrp="1" noRot="1" noChangeAspect="1"/>
           </p:cNvSpPr>
           <p:nvPr>
             <p:ph type="sldImg" idx="2"/>
@@ -924,7 +718,7 @@
             <a:spLocks noGrp="1"/>
           </p:cNvSpPr>
           <p:nvPr>
-            <p:ph type="body" idx="3" sz="quarter"/>
+            <p:ph type="body" sz="quarter" idx="3"/>
           </p:nvPr>
         </p:nvSpPr>
         <p:spPr/>
@@ -945,7 +739,7 @@
             <a:spLocks noGrp="1"/>
           </p:cNvSpPr>
           <p:nvPr>
-            <p:ph type="sldNum" idx="5" sz="quarter"/>
+            <p:ph type="sldNum" sz="quarter" idx="5"/>
           </p:nvPr>
         </p:nvSpPr>
         <p:spPr/>
@@ -959,7 +753,7 @@
 </file>
 
 <file path=ppt/notesSlides/notesSlide5.xml><?xml version="1.0" encoding="utf-8"?>
-<p:notes xmlns:a="http://schemas.openxmlformats.org/drawingml/2006/main" xmlns:p="http://schemas.openxmlformats.org/presentationml/2006/main" xmlns:r="http://schemas.openxmlformats.org/officeDocument/2006/relationships">
+<p:notes xmlns:a="http://schemas.openxmlformats.org/drawingml/2006/main" xmlns:r="http://schemas.openxmlformats.org/officeDocument/2006/relationships" xmlns:p="http://schemas.openxmlformats.org/presentationml/2006/main">
   <p:cSld>
     <p:spTree>
       <p:nvGrpSpPr>
@@ -979,7 +773,7 @@
         <p:nvSpPr>
           <p:cNvPr id="2" name="Slide Image Placeholder 1"/>
           <p:cNvSpPr>
-            <a:spLocks noGrp="1"/>
+            <a:spLocks noGrp="1" noRot="1" noChangeAspect="1"/>
           </p:cNvSpPr>
           <p:nvPr>
             <p:ph type="sldImg" idx="2"/>
@@ -994,7 +788,7 @@
             <a:spLocks noGrp="1"/>
           </p:cNvSpPr>
           <p:nvPr>
-            <p:ph type="body" idx="3" sz="quarter"/>
+            <p:ph type="body" sz="quarter" idx="3"/>
           </p:nvPr>
         </p:nvSpPr>
         <p:spPr/>
@@ -1015,7 +809,7 @@
             <a:spLocks noGrp="1"/>
           </p:cNvSpPr>
           <p:nvPr>
-            <p:ph type="sldNum" idx="5" sz="quarter"/>
+            <p:ph type="sldNum" sz="quarter" idx="5"/>
           </p:nvPr>
         </p:nvSpPr>
         <p:spPr/>
@@ -1029,7 +823,7 @@
 </file>
 
 <file path=ppt/notesSlides/notesSlide6.xml><?xml version="1.0" encoding="utf-8"?>
-<p:notes xmlns:a="http://schemas.openxmlformats.org/drawingml/2006/main" xmlns:p="http://schemas.openxmlformats.org/presentationml/2006/main" xmlns:r="http://schemas.openxmlformats.org/officeDocument/2006/relationships">
+<p:notes xmlns:a="http://schemas.openxmlformats.org/drawingml/2006/main" xmlns:r="http://schemas.openxmlformats.org/officeDocument/2006/relationships" xmlns:p="http://schemas.openxmlformats.org/presentationml/2006/main">
   <p:cSld>
     <p:spTree>
       <p:nvGrpSpPr>
@@ -1049,7 +843,7 @@
         <p:nvSpPr>
           <p:cNvPr id="2" name="Slide Image Placeholder 1"/>
           <p:cNvSpPr>
-            <a:spLocks noGrp="1"/>
+            <a:spLocks noGrp="1" noRot="1" noChangeAspect="1"/>
           </p:cNvSpPr>
           <p:nvPr>
             <p:ph type="sldImg" idx="2"/>
@@ -1064,7 +858,7 @@
             <a:spLocks noGrp="1"/>
           </p:cNvSpPr>
           <p:nvPr>
-            <p:ph type="body" idx="3" sz="quarter"/>
+            <p:ph type="body" sz="quarter" idx="3"/>
           </p:nvPr>
         </p:nvSpPr>
         <p:spPr/>
@@ -1085,7 +879,7 @@
             <a:spLocks noGrp="1"/>
           </p:cNvSpPr>
           <p:nvPr>
-            <p:ph type="sldNum" idx="5" sz="quarter"/>
+            <p:ph type="sldNum" sz="quarter" idx="5"/>
           </p:nvPr>
         </p:nvSpPr>
         <p:spPr/>
@@ -1099,7 +893,7 @@
 </file>
 
 <file path=ppt/notesSlides/notesSlide7.xml><?xml version="1.0" encoding="utf-8"?>
-<p:notes xmlns:a="http://schemas.openxmlformats.org/drawingml/2006/main" xmlns:p="http://schemas.openxmlformats.org/presentationml/2006/main" xmlns:r="http://schemas.openxmlformats.org/officeDocument/2006/relationships">
+<p:notes xmlns:a="http://schemas.openxmlformats.org/drawingml/2006/main" xmlns:r="http://schemas.openxmlformats.org/officeDocument/2006/relationships" xmlns:p="http://schemas.openxmlformats.org/presentationml/2006/main">
   <p:cSld>
     <p:spTree>
       <p:nvGrpSpPr>
@@ -1119,7 +913,7 @@
         <p:nvSpPr>
           <p:cNvPr id="2" name="Slide Image Placeholder 1"/>
           <p:cNvSpPr>
-            <a:spLocks noGrp="1"/>
+            <a:spLocks noGrp="1" noRot="1" noChangeAspect="1"/>
           </p:cNvSpPr>
           <p:nvPr>
             <p:ph type="sldImg" idx="2"/>
@@ -1134,7 +928,7 @@
             <a:spLocks noGrp="1"/>
           </p:cNvSpPr>
           <p:nvPr>
-            <p:ph type="body" idx="3" sz="quarter"/>
+            <p:ph type="body" sz="quarter" idx="3"/>
           </p:nvPr>
         </p:nvSpPr>
         <p:spPr/>
@@ -1155,7 +949,7 @@
             <a:spLocks noGrp="1"/>
           </p:cNvSpPr>
           <p:nvPr>
-            <p:ph type="sldNum" idx="5" sz="quarter"/>
+            <p:ph type="sldNum" sz="quarter" idx="5"/>
           </p:nvPr>
         </p:nvSpPr>
         <p:spPr/>
@@ -1169,7 +963,7 @@
 </file>
 
 <file path=ppt/notesSlides/notesSlide8.xml><?xml version="1.0" encoding="utf-8"?>
-<p:notes xmlns:a="http://schemas.openxmlformats.org/drawingml/2006/main" xmlns:p="http://schemas.openxmlformats.org/presentationml/2006/main" xmlns:r="http://schemas.openxmlformats.org/officeDocument/2006/relationships">
+<p:notes xmlns:a="http://schemas.openxmlformats.org/drawingml/2006/main" xmlns:r="http://schemas.openxmlformats.org/officeDocument/2006/relationships" xmlns:p="http://schemas.openxmlformats.org/presentationml/2006/main">
   <p:cSld>
     <p:spTree>
       <p:nvGrpSpPr>
@@ -1189,7 +983,7 @@
         <p:nvSpPr>
           <p:cNvPr id="2" name="Slide Image Placeholder 1"/>
           <p:cNvSpPr>
-            <a:spLocks noGrp="1"/>
+            <a:spLocks noGrp="1" noRot="1" noChangeAspect="1"/>
           </p:cNvSpPr>
           <p:nvPr>
             <p:ph type="sldImg" idx="2"/>
@@ -1204,7 +998,7 @@
             <a:spLocks noGrp="1"/>
           </p:cNvSpPr>
           <p:nvPr>
-            <p:ph type="body" idx="3" sz="quarter"/>
+            <p:ph type="body" sz="quarter" idx="3"/>
           </p:nvPr>
         </p:nvSpPr>
         <p:spPr/>
@@ -1225,7 +1019,7 @@
             <a:spLocks noGrp="1"/>
           </p:cNvSpPr>
           <p:nvPr>
-            <p:ph type="sldNum" idx="5" sz="quarter"/>
+            <p:ph type="sldNum" sz="quarter" idx="5"/>
           </p:nvPr>
         </p:nvSpPr>
         <p:spPr/>
@@ -1239,7 +1033,7 @@
 </file>
 
 <file path=ppt/notesSlides/notesSlide9.xml><?xml version="1.0" encoding="utf-8"?>
-<p:notes xmlns:a="http://schemas.openxmlformats.org/drawingml/2006/main" xmlns:p="http://schemas.openxmlformats.org/presentationml/2006/main" xmlns:r="http://schemas.openxmlformats.org/officeDocument/2006/relationships">
+<p:notes xmlns:a="http://schemas.openxmlformats.org/drawingml/2006/main" xmlns:r="http://schemas.openxmlformats.org/officeDocument/2006/relationships" xmlns:p="http://schemas.openxmlformats.org/presentationml/2006/main">
   <p:cSld>
     <p:spTree>
       <p:nvGrpSpPr>
@@ -1259,7 +1053,7 @@
         <p:nvSpPr>
           <p:cNvPr id="2" name="Slide Image Placeholder 1"/>
           <p:cNvSpPr>
-            <a:spLocks noGrp="1"/>
+            <a:spLocks noGrp="1" noRot="1" noChangeAspect="1"/>
           </p:cNvSpPr>
           <p:nvPr>
             <p:ph type="sldImg" idx="2"/>
@@ -1274,7 +1068,7 @@
             <a:spLocks noGrp="1"/>
           </p:cNvSpPr>
           <p:nvPr>
-            <p:ph type="body" idx="3" sz="quarter"/>
+            <p:ph type="body" sz="quarter" idx="3"/>
           </p:nvPr>
         </p:nvSpPr>
         <p:spPr/>
@@ -1295,7 +1089,7 @@
             <a:spLocks noGrp="1"/>
           </p:cNvSpPr>
           <p:nvPr>
-            <p:ph type="sldNum" idx="5" sz="quarter"/>
+            <p:ph type="sldNum" sz="quarter" idx="5"/>
           </p:nvPr>
         </p:nvSpPr>
         <p:spPr/>
@@ -1346,10 +1140,9 @@
           <a:lstStyle/>
           <a:p>
             <a:r>
-              <a:rPr lang="en-US" smtClean="0"/>
+              <a:rPr lang="en-US"/>
               <a:t>Click to edit Master title style</a:t>
             </a:r>
-            <a:endParaRPr lang="en-US"/>
           </a:p>
         </p:txBody>
       </p:sp>
@@ -1465,10 +1258,9 @@
           </a:lstStyle>
           <a:p>
             <a:r>
-              <a:rPr lang="en-US" smtClean="0"/>
+              <a:rPr lang="en-US"/>
               <a:t>Click to edit Master subtitle style</a:t>
             </a:r>
-            <a:endParaRPr lang="en-US"/>
           </a:p>
         </p:txBody>
       </p:sp>
@@ -1489,7 +1281,7 @@
           <a:p>
             <a:fld id="{5BCAD085-E8A6-8845-BD4E-CB4CCA059FC4}" type="datetimeFigureOut">
               <a:rPr lang="en-US" smtClean="0"/>
-              <a:t>1/27/13</a:t>
+              <a:t>9/12/2026</a:t>
             </a:fld>
             <a:endParaRPr lang="en-US"/>
           </a:p>
@@ -1583,10 +1375,9 @@
           <a:lstStyle/>
           <a:p>
             <a:r>
-              <a:rPr lang="en-US" smtClean="0"/>
+              <a:rPr lang="en-US"/>
               <a:t>Click to edit Master title style</a:t>
             </a:r>
-            <a:endParaRPr lang="en-US"/>
           </a:p>
         </p:txBody>
       </p:sp>
@@ -1607,38 +1398,37 @@
           <a:p>
             <a:pPr lvl="0"/>
             <a:r>
-              <a:rPr lang="en-US" smtClean="0"/>
+              <a:rPr lang="en-US"/>
               <a:t>Click to edit Master text styles</a:t>
             </a:r>
           </a:p>
           <a:p>
             <a:pPr lvl="1"/>
             <a:r>
-              <a:rPr lang="en-US" smtClean="0"/>
+              <a:rPr lang="en-US"/>
               <a:t>Second level</a:t>
             </a:r>
           </a:p>
           <a:p>
             <a:pPr lvl="2"/>
             <a:r>
-              <a:rPr lang="en-US" smtClean="0"/>
+              <a:rPr lang="en-US"/>
               <a:t>Third level</a:t>
             </a:r>
           </a:p>
           <a:p>
             <a:pPr lvl="3"/>
             <a:r>
-              <a:rPr lang="en-US" smtClean="0"/>
+              <a:rPr lang="en-US"/>
               <a:t>Fourth level</a:t>
             </a:r>
           </a:p>
           <a:p>
             <a:pPr lvl="4"/>
             <a:r>
-              <a:rPr lang="en-US" smtClean="0"/>
+              <a:rPr lang="en-US"/>
               <a:t>Fifth level</a:t>
             </a:r>
-            <a:endParaRPr lang="en-US"/>
           </a:p>
         </p:txBody>
       </p:sp>
@@ -1659,7 +1449,7 @@
           <a:p>
             <a:fld id="{5BCAD085-E8A6-8845-BD4E-CB4CCA059FC4}" type="datetimeFigureOut">
               <a:rPr lang="en-US" smtClean="0"/>
-              <a:t>1/27/13</a:t>
+              <a:t>9/12/2026</a:t>
             </a:fld>
             <a:endParaRPr lang="en-US"/>
           </a:p>
@@ -1758,10 +1548,9 @@
           <a:lstStyle/>
           <a:p>
             <a:r>
-              <a:rPr lang="en-US" smtClean="0"/>
+              <a:rPr lang="en-US"/>
               <a:t>Click to edit Master title style</a:t>
             </a:r>
-            <a:endParaRPr lang="en-US"/>
           </a:p>
         </p:txBody>
       </p:sp>
@@ -1787,38 +1576,37 @@
           <a:p>
             <a:pPr lvl="0"/>
             <a:r>
-              <a:rPr lang="en-US" smtClean="0"/>
+              <a:rPr lang="en-US"/>
               <a:t>Click to edit Master text styles</a:t>
             </a:r>
           </a:p>
           <a:p>
             <a:pPr lvl="1"/>
             <a:r>
-              <a:rPr lang="en-US" smtClean="0"/>
+              <a:rPr lang="en-US"/>
               <a:t>Second level</a:t>
             </a:r>
           </a:p>
           <a:p>
             <a:pPr lvl="2"/>
             <a:r>
-              <a:rPr lang="en-US" smtClean="0"/>
+              <a:rPr lang="en-US"/>
               <a:t>Third level</a:t>
             </a:r>
           </a:p>
           <a:p>
             <a:pPr lvl="3"/>
             <a:r>
-              <a:rPr lang="en-US" smtClean="0"/>
+              <a:rPr lang="en-US"/>
               <a:t>Fourth level</a:t>
             </a:r>
           </a:p>
           <a:p>
             <a:pPr lvl="4"/>
             <a:r>
-              <a:rPr lang="en-US" smtClean="0"/>
+              <a:rPr lang="en-US"/>
               <a:t>Fifth level</a:t>
             </a:r>
-            <a:endParaRPr lang="en-US"/>
           </a:p>
         </p:txBody>
       </p:sp>
@@ -1839,7 +1627,7 @@
           <a:p>
             <a:fld id="{5BCAD085-E8A6-8845-BD4E-CB4CCA059FC4}" type="datetimeFigureOut">
               <a:rPr lang="en-US" smtClean="0"/>
-              <a:t>1/27/13</a:t>
+              <a:t>9/12/2026</a:t>
             </a:fld>
             <a:endParaRPr lang="en-US"/>
           </a:p>
@@ -1933,10 +1721,9 @@
           <a:lstStyle/>
           <a:p>
             <a:r>
-              <a:rPr lang="en-US" smtClean="0"/>
+              <a:rPr lang="en-US"/>
               <a:t>Click to edit Master title style</a:t>
             </a:r>
-            <a:endParaRPr lang="en-US"/>
           </a:p>
         </p:txBody>
       </p:sp>
@@ -1957,38 +1744,37 @@
           <a:p>
             <a:pPr lvl="0"/>
             <a:r>
-              <a:rPr lang="en-US" smtClean="0"/>
+              <a:rPr lang="en-US"/>
               <a:t>Click to edit Master text styles</a:t>
             </a:r>
           </a:p>
           <a:p>
             <a:pPr lvl="1"/>
             <a:r>
-              <a:rPr lang="en-US" smtClean="0"/>
+              <a:rPr lang="en-US"/>
               <a:t>Second level</a:t>
             </a:r>
           </a:p>
           <a:p>
             <a:pPr lvl="2"/>
             <a:r>
-              <a:rPr lang="en-US" smtClean="0"/>
+              <a:rPr lang="en-US"/>
               <a:t>Third level</a:t>
             </a:r>
           </a:p>
           <a:p>
             <a:pPr lvl="3"/>
             <a:r>
-              <a:rPr lang="en-US" smtClean="0"/>
+              <a:rPr lang="en-US"/>
               <a:t>Fourth level</a:t>
             </a:r>
           </a:p>
           <a:p>
             <a:pPr lvl="4"/>
             <a:r>
-              <a:rPr lang="en-US" smtClean="0"/>
+              <a:rPr lang="en-US"/>
               <a:t>Fifth level</a:t>
             </a:r>
-            <a:endParaRPr lang="en-US"/>
           </a:p>
         </p:txBody>
       </p:sp>
@@ -2009,7 +1795,7 @@
           <a:p>
             <a:fld id="{5BCAD085-E8A6-8845-BD4E-CB4CCA059FC4}" type="datetimeFigureOut">
               <a:rPr lang="en-US" smtClean="0"/>
-              <a:t>1/27/13</a:t>
+              <a:t>9/12/2026</a:t>
             </a:fld>
             <a:endParaRPr lang="en-US"/>
           </a:p>
@@ -2112,10 +1898,9 @@
           </a:lstStyle>
           <a:p>
             <a:r>
-              <a:rPr lang="en-US" smtClean="0"/>
+              <a:rPr lang="en-US"/>
               <a:t>Click to edit Master title style</a:t>
             </a:r>
-            <a:endParaRPr lang="en-US"/>
           </a:p>
         </p:txBody>
       </p:sp>
@@ -2232,7 +2017,7 @@
           <a:p>
             <a:pPr lvl="0"/>
             <a:r>
-              <a:rPr lang="en-US" smtClean="0"/>
+              <a:rPr lang="en-US"/>
               <a:t>Click to edit Master text styles</a:t>
             </a:r>
           </a:p>
@@ -2255,7 +2040,7 @@
           <a:p>
             <a:fld id="{5BCAD085-E8A6-8845-BD4E-CB4CCA059FC4}" type="datetimeFigureOut">
               <a:rPr lang="en-US" smtClean="0"/>
-              <a:t>1/27/13</a:t>
+              <a:t>9/12/2026</a:t>
             </a:fld>
             <a:endParaRPr lang="en-US"/>
           </a:p>
@@ -2349,10 +2134,9 @@
           <a:lstStyle/>
           <a:p>
             <a:r>
-              <a:rPr lang="en-US" smtClean="0"/>
+              <a:rPr lang="en-US"/>
               <a:t>Click to edit Master title style</a:t>
             </a:r>
-            <a:endParaRPr lang="en-US"/>
           </a:p>
         </p:txBody>
       </p:sp>
@@ -2406,38 +2190,37 @@
           <a:p>
             <a:pPr lvl="0"/>
             <a:r>
-              <a:rPr lang="en-US" smtClean="0"/>
+              <a:rPr lang="en-US"/>
               <a:t>Click to edit Master text styles</a:t>
             </a:r>
           </a:p>
           <a:p>
             <a:pPr lvl="1"/>
             <a:r>
-              <a:rPr lang="en-US" smtClean="0"/>
+              <a:rPr lang="en-US"/>
               <a:t>Second level</a:t>
             </a:r>
           </a:p>
           <a:p>
             <a:pPr lvl="2"/>
             <a:r>
-              <a:rPr lang="en-US" smtClean="0"/>
+              <a:rPr lang="en-US"/>
               <a:t>Third level</a:t>
             </a:r>
           </a:p>
           <a:p>
             <a:pPr lvl="3"/>
             <a:r>
-              <a:rPr lang="en-US" smtClean="0"/>
+              <a:rPr lang="en-US"/>
               <a:t>Fourth level</a:t>
             </a:r>
           </a:p>
           <a:p>
             <a:pPr lvl="4"/>
             <a:r>
-              <a:rPr lang="en-US" smtClean="0"/>
+              <a:rPr lang="en-US"/>
               <a:t>Fifth level</a:t>
             </a:r>
-            <a:endParaRPr lang="en-US"/>
           </a:p>
         </p:txBody>
       </p:sp>
@@ -2491,38 +2274,37 @@
           <a:p>
             <a:pPr lvl="0"/>
             <a:r>
-              <a:rPr lang="en-US" smtClean="0"/>
+              <a:rPr lang="en-US"/>
               <a:t>Click to edit Master text styles</a:t>
             </a:r>
           </a:p>
           <a:p>
             <a:pPr lvl="1"/>
             <a:r>
-              <a:rPr lang="en-US" smtClean="0"/>
+              <a:rPr lang="en-US"/>
               <a:t>Second level</a:t>
             </a:r>
           </a:p>
           <a:p>
             <a:pPr lvl="2"/>
             <a:r>
-              <a:rPr lang="en-US" smtClean="0"/>
+              <a:rPr lang="en-US"/>
               <a:t>Third level</a:t>
             </a:r>
           </a:p>
           <a:p>
             <a:pPr lvl="3"/>
             <a:r>
-              <a:rPr lang="en-US" smtClean="0"/>
+              <a:rPr lang="en-US"/>
               <a:t>Fourth level</a:t>
             </a:r>
           </a:p>
           <a:p>
             <a:pPr lvl="4"/>
             <a:r>
-              <a:rPr lang="en-US" smtClean="0"/>
+              <a:rPr lang="en-US"/>
               <a:t>Fifth level</a:t>
             </a:r>
-            <a:endParaRPr lang="en-US"/>
           </a:p>
         </p:txBody>
       </p:sp>
@@ -2543,7 +2325,7 @@
           <a:p>
             <a:fld id="{5BCAD085-E8A6-8845-BD4E-CB4CCA059FC4}" type="datetimeFigureOut">
               <a:rPr lang="en-US" smtClean="0"/>
-              <a:t>1/27/13</a:t>
+              <a:t>9/12/2026</a:t>
             </a:fld>
             <a:endParaRPr lang="en-US"/>
           </a:p>
@@ -2641,10 +2423,9 @@
           </a:lstStyle>
           <a:p>
             <a:r>
-              <a:rPr lang="en-US" smtClean="0"/>
+              <a:rPr lang="en-US"/>
               <a:t>Click to edit Master title style</a:t>
             </a:r>
-            <a:endParaRPr lang="en-US"/>
           </a:p>
         </p:txBody>
       </p:sp>
@@ -2707,7 +2488,7 @@
           <a:p>
             <a:pPr lvl="0"/>
             <a:r>
-              <a:rPr lang="en-US" smtClean="0"/>
+              <a:rPr lang="en-US"/>
               <a:t>Click to edit Master text styles</a:t>
             </a:r>
           </a:p>
@@ -2763,38 +2544,37 @@
           <a:p>
             <a:pPr lvl="0"/>
             <a:r>
-              <a:rPr lang="en-US" smtClean="0"/>
+              <a:rPr lang="en-US"/>
               <a:t>Click to edit Master text styles</a:t>
             </a:r>
           </a:p>
           <a:p>
             <a:pPr lvl="1"/>
             <a:r>
-              <a:rPr lang="en-US" smtClean="0"/>
+              <a:rPr lang="en-US"/>
               <a:t>Second level</a:t>
             </a:r>
           </a:p>
           <a:p>
             <a:pPr lvl="2"/>
             <a:r>
-              <a:rPr lang="en-US" smtClean="0"/>
+              <a:rPr lang="en-US"/>
               <a:t>Third level</a:t>
             </a:r>
           </a:p>
           <a:p>
             <a:pPr lvl="3"/>
             <a:r>
-              <a:rPr lang="en-US" smtClean="0"/>
+              <a:rPr lang="en-US"/>
               <a:t>Fourth level</a:t>
             </a:r>
           </a:p>
           <a:p>
             <a:pPr lvl="4"/>
             <a:r>
-              <a:rPr lang="en-US" smtClean="0"/>
+              <a:rPr lang="en-US"/>
               <a:t>Fifth level</a:t>
             </a:r>
-            <a:endParaRPr lang="en-US"/>
           </a:p>
         </p:txBody>
       </p:sp>
@@ -2857,7 +2637,7 @@
           <a:p>
             <a:pPr lvl="0"/>
             <a:r>
-              <a:rPr lang="en-US" smtClean="0"/>
+              <a:rPr lang="en-US"/>
               <a:t>Click to edit Master text styles</a:t>
             </a:r>
           </a:p>
@@ -2913,38 +2693,37 @@
           <a:p>
             <a:pPr lvl="0"/>
             <a:r>
-              <a:rPr lang="en-US" smtClean="0"/>
+              <a:rPr lang="en-US"/>
               <a:t>Click to edit Master text styles</a:t>
             </a:r>
           </a:p>
           <a:p>
             <a:pPr lvl="1"/>
             <a:r>
-              <a:rPr lang="en-US" smtClean="0"/>
+              <a:rPr lang="en-US"/>
               <a:t>Second level</a:t>
             </a:r>
           </a:p>
           <a:p>
             <a:pPr lvl="2"/>
             <a:r>
-              <a:rPr lang="en-US" smtClean="0"/>
+              <a:rPr lang="en-US"/>
               <a:t>Third level</a:t>
             </a:r>
           </a:p>
           <a:p>
             <a:pPr lvl="3"/>
             <a:r>
-              <a:rPr lang="en-US" smtClean="0"/>
+              <a:rPr lang="en-US"/>
               <a:t>Fourth level</a:t>
             </a:r>
           </a:p>
           <a:p>
             <a:pPr lvl="4"/>
             <a:r>
-              <a:rPr lang="en-US" smtClean="0"/>
+              <a:rPr lang="en-US"/>
               <a:t>Fifth level</a:t>
             </a:r>
-            <a:endParaRPr lang="en-US"/>
           </a:p>
         </p:txBody>
       </p:sp>
@@ -2965,7 +2744,7 @@
           <a:p>
             <a:fld id="{5BCAD085-E8A6-8845-BD4E-CB4CCA059FC4}" type="datetimeFigureOut">
               <a:rPr lang="en-US" smtClean="0"/>
-              <a:t>1/27/13</a:t>
+              <a:t>9/12/2026</a:t>
             </a:fld>
             <a:endParaRPr lang="en-US"/>
           </a:p>
@@ -3059,10 +2838,9 @@
           <a:lstStyle/>
           <a:p>
             <a:r>
-              <a:rPr lang="en-US" smtClean="0"/>
+              <a:rPr lang="en-US"/>
               <a:t>Click to edit Master title style</a:t>
             </a:r>
-            <a:endParaRPr lang="en-US"/>
           </a:p>
         </p:txBody>
       </p:sp>
@@ -3083,7 +2861,7 @@
           <a:p>
             <a:fld id="{5BCAD085-E8A6-8845-BD4E-CB4CCA059FC4}" type="datetimeFigureOut">
               <a:rPr lang="en-US" smtClean="0"/>
-              <a:t>1/27/13</a:t>
+              <a:t>9/12/2026</a:t>
             </a:fld>
             <a:endParaRPr lang="en-US"/>
           </a:p>
@@ -3178,7 +2956,7 @@
           <a:p>
             <a:fld id="{5BCAD085-E8A6-8845-BD4E-CB4CCA059FC4}" type="datetimeFigureOut">
               <a:rPr lang="en-US" smtClean="0"/>
-              <a:t>1/27/13</a:t>
+              <a:t>9/12/2026</a:t>
             </a:fld>
             <a:endParaRPr lang="en-US"/>
           </a:p>
@@ -3281,10 +3059,9 @@
           </a:lstStyle>
           <a:p>
             <a:r>
-              <a:rPr lang="en-US" smtClean="0"/>
+              <a:rPr lang="en-US"/>
               <a:t>Click to edit Master title style</a:t>
             </a:r>
-            <a:endParaRPr lang="en-US"/>
           </a:p>
         </p:txBody>
       </p:sp>
@@ -3338,38 +3115,37 @@
           <a:p>
             <a:pPr lvl="0"/>
             <a:r>
-              <a:rPr lang="en-US" smtClean="0"/>
+              <a:rPr lang="en-US"/>
               <a:t>Click to edit Master text styles</a:t>
             </a:r>
           </a:p>
           <a:p>
             <a:pPr lvl="1"/>
             <a:r>
-              <a:rPr lang="en-US" smtClean="0"/>
+              <a:rPr lang="en-US"/>
               <a:t>Second level</a:t>
             </a:r>
           </a:p>
           <a:p>
             <a:pPr lvl="2"/>
             <a:r>
-              <a:rPr lang="en-US" smtClean="0"/>
+              <a:rPr lang="en-US"/>
               <a:t>Third level</a:t>
             </a:r>
           </a:p>
           <a:p>
             <a:pPr lvl="3"/>
             <a:r>
-              <a:rPr lang="en-US" smtClean="0"/>
+              <a:rPr lang="en-US"/>
               <a:t>Fourth level</a:t>
             </a:r>
           </a:p>
           <a:p>
             <a:pPr lvl="4"/>
             <a:r>
-              <a:rPr lang="en-US" smtClean="0"/>
+              <a:rPr lang="en-US"/>
               <a:t>Fifth level</a:t>
             </a:r>
-            <a:endParaRPr lang="en-US"/>
           </a:p>
         </p:txBody>
       </p:sp>
@@ -3432,7 +3208,7 @@
           <a:p>
             <a:pPr lvl="0"/>
             <a:r>
-              <a:rPr lang="en-US" smtClean="0"/>
+              <a:rPr lang="en-US"/>
               <a:t>Click to edit Master text styles</a:t>
             </a:r>
           </a:p>
@@ -3455,7 +3231,7 @@
           <a:p>
             <a:fld id="{5BCAD085-E8A6-8845-BD4E-CB4CCA059FC4}" type="datetimeFigureOut">
               <a:rPr lang="en-US" smtClean="0"/>
-              <a:t>1/27/13</a:t>
+              <a:t>9/12/2026</a:t>
             </a:fld>
             <a:endParaRPr lang="en-US"/>
           </a:p>
@@ -3558,10 +3334,9 @@
           </a:lstStyle>
           <a:p>
             <a:r>
-              <a:rPr lang="en-US" smtClean="0"/>
+              <a:rPr lang="en-US"/>
               <a:t>Click to edit Master title style</a:t>
             </a:r>
-            <a:endParaRPr lang="en-US"/>
           </a:p>
         </p:txBody>
       </p:sp>
@@ -3685,7 +3460,7 @@
           <a:p>
             <a:pPr lvl="0"/>
             <a:r>
-              <a:rPr lang="en-US" smtClean="0"/>
+              <a:rPr lang="en-US"/>
               <a:t>Click to edit Master text styles</a:t>
             </a:r>
           </a:p>
@@ -3708,7 +3483,7 @@
           <a:p>
             <a:fld id="{5BCAD085-E8A6-8845-BD4E-CB4CCA059FC4}" type="datetimeFigureOut">
               <a:rPr lang="en-US" smtClean="0"/>
-              <a:t>1/27/13</a:t>
+              <a:t>9/12/2026</a:t>
             </a:fld>
             <a:endParaRPr lang="en-US"/>
           </a:p>
@@ -3817,10 +3592,9 @@
           <a:lstStyle/>
           <a:p>
             <a:r>
-              <a:rPr lang="en-US" smtClean="0"/>
+              <a:rPr lang="en-US"/>
               <a:t>Click to edit Master title style</a:t>
             </a:r>
-            <a:endParaRPr lang="en-US"/>
           </a:p>
         </p:txBody>
       </p:sp>
@@ -3851,38 +3625,37 @@
           <a:p>
             <a:pPr lvl="0"/>
             <a:r>
-              <a:rPr lang="en-US" smtClean="0"/>
+              <a:rPr lang="en-US"/>
               <a:t>Click to edit Master text styles</a:t>
             </a:r>
           </a:p>
           <a:p>
             <a:pPr lvl="1"/>
             <a:r>
-              <a:rPr lang="en-US" smtClean="0"/>
+              <a:rPr lang="en-US"/>
               <a:t>Second level</a:t>
             </a:r>
           </a:p>
           <a:p>
             <a:pPr lvl="2"/>
             <a:r>
-              <a:rPr lang="en-US" smtClean="0"/>
+              <a:rPr lang="en-US"/>
               <a:t>Third level</a:t>
             </a:r>
           </a:p>
           <a:p>
             <a:pPr lvl="3"/>
             <a:r>
-              <a:rPr lang="en-US" smtClean="0"/>
+              <a:rPr lang="en-US"/>
               <a:t>Fourth level</a:t>
             </a:r>
           </a:p>
           <a:p>
             <a:pPr lvl="4"/>
             <a:r>
-              <a:rPr lang="en-US" smtClean="0"/>
+              <a:rPr lang="en-US"/>
               <a:t>Fifth level</a:t>
             </a:r>
-            <a:endParaRPr lang="en-US"/>
           </a:p>
         </p:txBody>
       </p:sp>
@@ -3921,7 +3694,7 @@
           <a:p>
             <a:fld id="{5BCAD085-E8A6-8845-BD4E-CB4CCA059FC4}" type="datetimeFigureOut">
               <a:rPr lang="en-US" smtClean="0"/>
-              <a:t>1/27/13</a:t>
+              <a:t>9/12/2026</a:t>
             </a:fld>
             <a:endParaRPr lang="en-US"/>
           </a:p>
@@ -4280,7 +4053,7 @@
 </file>
 
 <file path=ppt/slides/slide1.xml><?xml version="1.0" encoding="utf-8"?>
-<p:sld xmlns:a="http://schemas.openxmlformats.org/drawingml/2006/main" xmlns:p="http://schemas.openxmlformats.org/presentationml/2006/main" xmlns:r="http://schemas.openxmlformats.org/officeDocument/2006/relationships">
+<p:sld xmlns:a="http://schemas.openxmlformats.org/drawingml/2006/main" xmlns:r="http://schemas.openxmlformats.org/officeDocument/2006/relationships" xmlns:p="http://schemas.openxmlformats.org/presentationml/2006/main">
   <p:cSld>
     <p:spTree>
       <p:nvGrpSpPr>
@@ -4288,7 +4061,14 @@
         <p:cNvGrpSpPr/>
         <p:nvPr/>
       </p:nvGrpSpPr>
-      <p:grpSpPr/>
+      <p:grpSpPr>
+        <a:xfrm>
+          <a:off x="0" y="0"/>
+          <a:ext cx="0" cy="0"/>
+          <a:chOff x="0" y="0"/>
+          <a:chExt cx="0" cy="0"/>
+        </a:xfrm>
+      </p:grpSpPr>
       <p:sp>
         <p:nvSpPr>
           <p:cNvPr id="2" name="Rectangle 1"/>
@@ -4330,6 +4110,7 @@
           <a:lstStyle/>
           <a:p>
             <a:pPr algn="ctr"/>
+            <a:endParaRPr/>
           </a:p>
         </p:txBody>
       </p:sp>
@@ -4374,6 +4155,7 @@
           <a:lstStyle/>
           <a:p>
             <a:pPr algn="ctr"/>
+            <a:endParaRPr/>
           </a:p>
         </p:txBody>
       </p:sp>
@@ -4394,7 +4176,7 @@
           <a:noFill/>
         </p:spPr>
         <p:txBody>
-          <a:bodyPr wrap="square" lIns="0" rIns="0" tIns="0" bIns="0" anchor="t">
+          <a:bodyPr wrap="square" lIns="0" tIns="0" rIns="0" bIns="0" anchor="t">
             <a:spAutoFit/>
           </a:bodyPr>
           <a:lstStyle/>
@@ -4424,16 +4206,16 @@
         </p:nvSpPr>
         <p:spPr>
           <a:xfrm>
-            <a:off x="914400" y="3429000"/>
-            <a:ext cx="9326880" cy="914400"/>
-          </a:xfrm>
-          <a:prstGeom prst="rect">
-            <a:avLst/>
-          </a:prstGeom>
-          <a:noFill/>
-        </p:spPr>
-        <p:txBody>
-          <a:bodyPr wrap="square" lIns="0" rIns="0" tIns="0" bIns="0" anchor="t">
+            <a:off x="914399" y="3429000"/>
+            <a:ext cx="10711544" cy="580480"/>
+          </a:xfrm>
+          <a:prstGeom prst="rect">
+            <a:avLst/>
+          </a:prstGeom>
+          <a:noFill/>
+        </p:spPr>
+        <p:txBody>
+          <a:bodyPr wrap="square" lIns="0" tIns="0" rIns="0" bIns="0" anchor="t">
             <a:spAutoFit/>
           </a:bodyPr>
           <a:lstStyle/>
@@ -4447,14 +4229,29 @@
               </a:spcAft>
             </a:pPr>
             <a:r>
-              <a:rPr sz="2000" b="0" i="0">
+              <a:rPr sz="3200" b="0" i="0" dirty="0">
                 <a:solidFill>
                   <a:srgbClr val="5A544E"/>
                 </a:solidFill>
                 <a:latin typeface="Segoe UI"/>
               </a:rPr>
-              <a:t>AI agents that run HR and finance — and a named human accountable for every consequential action.</a:t>
-            </a:r>
+              <a:t>AI agents run HR and finance — </a:t>
+            </a:r>
+            <a:r>
+              <a:rPr lang="en-US" sz="3200" b="0" i="0" dirty="0">
+                <a:solidFill>
+                  <a:srgbClr val="5A544E"/>
+                </a:solidFill>
+                <a:latin typeface="Segoe UI"/>
+              </a:rPr>
+              <a:t>with human oversight</a:t>
+            </a:r>
+            <a:endParaRPr sz="3200" b="0" i="0" dirty="0">
+              <a:solidFill>
+                <a:srgbClr val="5A544E"/>
+              </a:solidFill>
+              <a:latin typeface="Segoe UI"/>
+            </a:endParaRPr>
           </a:p>
         </p:txBody>
       </p:sp>
@@ -4499,6 +4296,7 @@
           <a:lstStyle/>
           <a:p>
             <a:pPr algn="ctr"/>
+            <a:endParaRPr/>
           </a:p>
         </p:txBody>
       </p:sp>
@@ -4519,7 +4317,7 @@
           <a:noFill/>
         </p:spPr>
         <p:txBody>
-          <a:bodyPr wrap="square" lIns="0" rIns="0" tIns="0" bIns="0" anchor="t">
+          <a:bodyPr wrap="square" lIns="0" tIns="0" rIns="0" bIns="0" anchor="t">
             <a:spAutoFit/>
           </a:bodyPr>
           <a:lstStyle/>
@@ -4566,7 +4364,7 @@
 </file>
 
 <file path=ppt/slides/slide10.xml><?xml version="1.0" encoding="utf-8"?>
-<p:sld xmlns:a="http://schemas.openxmlformats.org/drawingml/2006/main" xmlns:p="http://schemas.openxmlformats.org/presentationml/2006/main" xmlns:r="http://schemas.openxmlformats.org/officeDocument/2006/relationships">
+<p:sld xmlns:a="http://schemas.openxmlformats.org/drawingml/2006/main" xmlns:r="http://schemas.openxmlformats.org/officeDocument/2006/relationships" xmlns:p="http://schemas.openxmlformats.org/presentationml/2006/main">
   <p:cSld>
     <p:spTree>
       <p:nvGrpSpPr>
@@ -4574,7 +4372,14 @@
         <p:cNvGrpSpPr/>
         <p:nvPr/>
       </p:nvGrpSpPr>
-      <p:grpSpPr/>
+      <p:grpSpPr>
+        <a:xfrm>
+          <a:off x="0" y="0"/>
+          <a:ext cx="0" cy="0"/>
+          <a:chOff x="0" y="0"/>
+          <a:chExt cx="0" cy="0"/>
+        </a:xfrm>
+      </p:grpSpPr>
       <p:sp>
         <p:nvSpPr>
           <p:cNvPr id="2" name="Rectangle 1"/>
@@ -4616,6 +4421,7 @@
           <a:lstStyle/>
           <a:p>
             <a:pPr algn="ctr"/>
+            <a:endParaRPr/>
           </a:p>
         </p:txBody>
       </p:sp>
@@ -4636,7 +4442,7 @@
           <a:noFill/>
         </p:spPr>
         <p:txBody>
-          <a:bodyPr wrap="square" lIns="0" rIns="0" tIns="0" bIns="0" anchor="t">
+          <a:bodyPr wrap="square" lIns="0" tIns="0" rIns="0" bIns="0" anchor="t">
             <a:spAutoFit/>
           </a:bodyPr>
           <a:lstStyle/>
@@ -4675,7 +4481,7 @@
           <a:noFill/>
         </p:spPr>
         <p:txBody>
-          <a:bodyPr wrap="square" lIns="0" rIns="0" tIns="0" bIns="0" anchor="t">
+          <a:bodyPr wrap="square" lIns="0" tIns="0" rIns="0" bIns="0" anchor="t">
             <a:spAutoFit/>
           </a:bodyPr>
           <a:lstStyle/>
@@ -4741,6 +4547,7 @@
           <a:lstStyle/>
           <a:p>
             <a:pPr algn="ctr"/>
+            <a:endParaRPr/>
           </a:p>
         </p:txBody>
       </p:sp>
@@ -4761,7 +4568,7 @@
           <a:noFill/>
         </p:spPr>
         <p:txBody>
-          <a:bodyPr wrap="square" lIns="0" rIns="0" tIns="0" bIns="0" anchor="t">
+          <a:bodyPr wrap="square" lIns="0" tIns="0" rIns="0" bIns="0" anchor="t">
             <a:spAutoFit/>
           </a:bodyPr>
           <a:lstStyle/>
@@ -4800,7 +4607,7 @@
           <a:noFill/>
         </p:spPr>
         <p:txBody>
-          <a:bodyPr wrap="square" lIns="0" rIns="0" tIns="0" bIns="0" anchor="t">
+          <a:bodyPr wrap="square" lIns="0" tIns="0" rIns="0" bIns="0" anchor="t">
             <a:spAutoFit/>
           </a:bodyPr>
           <a:lstStyle/>
@@ -4865,6 +4672,7 @@
           <a:lstStyle/>
           <a:p>
             <a:pPr algn="ctr"/>
+            <a:endParaRPr/>
           </a:p>
         </p:txBody>
       </p:sp>
@@ -4909,6 +4717,7 @@
           <a:lstStyle/>
           <a:p>
             <a:pPr algn="ctr"/>
+            <a:endParaRPr/>
           </a:p>
         </p:txBody>
       </p:sp>
@@ -4929,7 +4738,7 @@
           <a:noFill/>
         </p:spPr>
         <p:txBody>
-          <a:bodyPr wrap="square" lIns="0" rIns="0" tIns="0" bIns="0" anchor="t">
+          <a:bodyPr wrap="square" lIns="0" tIns="0" rIns="0" bIns="0" anchor="t">
             <a:spAutoFit/>
           </a:bodyPr>
           <a:lstStyle/>
@@ -4992,6 +4801,7 @@
           <a:lstStyle/>
           <a:p>
             <a:pPr algn="ctr"/>
+            <a:endParaRPr/>
           </a:p>
         </p:txBody>
       </p:sp>
@@ -5012,7 +4822,7 @@
           <a:noFill/>
         </p:spPr>
         <p:txBody>
-          <a:bodyPr wrap="square" lIns="0" rIns="0" tIns="0" bIns="0" anchor="t">
+          <a:bodyPr wrap="square" lIns="0" tIns="0" rIns="0" bIns="0" anchor="t">
             <a:spAutoFit/>
           </a:bodyPr>
           <a:lstStyle/>
@@ -5078,6 +4888,7 @@
           <a:lstStyle/>
           <a:p>
             <a:pPr algn="ctr"/>
+            <a:endParaRPr/>
           </a:p>
         </p:txBody>
       </p:sp>
@@ -5098,7 +4909,7 @@
           <a:noFill/>
         </p:spPr>
         <p:txBody>
-          <a:bodyPr wrap="square" lIns="0" rIns="0" tIns="0" bIns="0" anchor="t">
+          <a:bodyPr wrap="square" lIns="0" tIns="0" rIns="0" bIns="0" anchor="t">
             <a:spAutoFit/>
           </a:bodyPr>
           <a:lstStyle/>
@@ -5164,6 +4975,7 @@
           <a:lstStyle/>
           <a:p>
             <a:pPr algn="ctr"/>
+            <a:endParaRPr/>
           </a:p>
         </p:txBody>
       </p:sp>
@@ -5184,7 +4996,7 @@
           <a:noFill/>
         </p:spPr>
         <p:txBody>
-          <a:bodyPr wrap="square" lIns="0" rIns="0" tIns="0" bIns="0" anchor="t">
+          <a:bodyPr wrap="square" lIns="0" tIns="0" rIns="0" bIns="0" anchor="t">
             <a:spAutoFit/>
           </a:bodyPr>
           <a:lstStyle/>
@@ -5252,6 +5064,7 @@
           <a:lstStyle/>
           <a:p>
             <a:pPr algn="ctr"/>
+            <a:endParaRPr/>
           </a:p>
         </p:txBody>
       </p:sp>
@@ -5296,6 +5109,7 @@
           <a:lstStyle/>
           <a:p>
             <a:pPr algn="ctr"/>
+            <a:endParaRPr/>
           </a:p>
         </p:txBody>
       </p:sp>
@@ -5316,7 +5130,7 @@
           <a:noFill/>
         </p:spPr>
         <p:txBody>
-          <a:bodyPr wrap="square" lIns="0" rIns="0" tIns="0" bIns="0" anchor="t">
+          <a:bodyPr wrap="square" lIns="0" tIns="0" rIns="0" bIns="0" anchor="t">
             <a:spAutoFit/>
           </a:bodyPr>
           <a:lstStyle/>
@@ -5379,6 +5193,7 @@
           <a:lstStyle/>
           <a:p>
             <a:pPr algn="ctr"/>
+            <a:endParaRPr/>
           </a:p>
         </p:txBody>
       </p:sp>
@@ -5399,7 +5214,7 @@
           <a:noFill/>
         </p:spPr>
         <p:txBody>
-          <a:bodyPr wrap="square" lIns="0" rIns="0" tIns="0" bIns="0" anchor="t">
+          <a:bodyPr wrap="square" lIns="0" tIns="0" rIns="0" bIns="0" anchor="t">
             <a:spAutoFit/>
           </a:bodyPr>
           <a:lstStyle/>
@@ -5465,6 +5280,7 @@
           <a:lstStyle/>
           <a:p>
             <a:pPr algn="ctr"/>
+            <a:endParaRPr/>
           </a:p>
         </p:txBody>
       </p:sp>
@@ -5485,7 +5301,7 @@
           <a:noFill/>
         </p:spPr>
         <p:txBody>
-          <a:bodyPr wrap="square" lIns="0" rIns="0" tIns="0" bIns="0" anchor="t">
+          <a:bodyPr wrap="square" lIns="0" tIns="0" rIns="0" bIns="0" anchor="t">
             <a:spAutoFit/>
           </a:bodyPr>
           <a:lstStyle/>
@@ -5551,6 +5367,7 @@
           <a:lstStyle/>
           <a:p>
             <a:pPr algn="ctr"/>
+            <a:endParaRPr/>
           </a:p>
         </p:txBody>
       </p:sp>
@@ -5571,7 +5388,7 @@
           <a:noFill/>
         </p:spPr>
         <p:txBody>
-          <a:bodyPr wrap="square" lIns="0" rIns="0" tIns="0" bIns="0" anchor="t">
+          <a:bodyPr wrap="square" lIns="0" tIns="0" rIns="0" bIns="0" anchor="t">
             <a:spAutoFit/>
           </a:bodyPr>
           <a:lstStyle/>
@@ -5613,7 +5430,7 @@
           <a:noFill/>
         </p:spPr>
         <p:txBody>
-          <a:bodyPr wrap="square" lIns="0" rIns="0" tIns="0" bIns="0" anchor="t">
+          <a:bodyPr wrap="square" lIns="0" tIns="0" rIns="0" bIns="0" anchor="t">
             <a:spAutoFit/>
           </a:bodyPr>
           <a:lstStyle/>
@@ -5656,7 +5473,7 @@
 </file>
 
 <file path=ppt/slides/slide11.xml><?xml version="1.0" encoding="utf-8"?>
-<p:sld xmlns:a="http://schemas.openxmlformats.org/drawingml/2006/main" xmlns:p="http://schemas.openxmlformats.org/presentationml/2006/main" xmlns:r="http://schemas.openxmlformats.org/officeDocument/2006/relationships">
+<p:sld xmlns:a="http://schemas.openxmlformats.org/drawingml/2006/main" xmlns:r="http://schemas.openxmlformats.org/officeDocument/2006/relationships" xmlns:p="http://schemas.openxmlformats.org/presentationml/2006/main">
   <p:cSld>
     <p:spTree>
       <p:nvGrpSpPr>
@@ -5664,7 +5481,14 @@
         <p:cNvGrpSpPr/>
         <p:nvPr/>
       </p:nvGrpSpPr>
-      <p:grpSpPr/>
+      <p:grpSpPr>
+        <a:xfrm>
+          <a:off x="0" y="0"/>
+          <a:ext cx="0" cy="0"/>
+          <a:chOff x="0" y="0"/>
+          <a:chExt cx="0" cy="0"/>
+        </a:xfrm>
+      </p:grpSpPr>
       <p:sp>
         <p:nvSpPr>
           <p:cNvPr id="2" name="Rectangle 1"/>
@@ -5706,6 +5530,7 @@
           <a:lstStyle/>
           <a:p>
             <a:pPr algn="ctr"/>
+            <a:endParaRPr/>
           </a:p>
         </p:txBody>
       </p:sp>
@@ -5726,7 +5551,7 @@
           <a:noFill/>
         </p:spPr>
         <p:txBody>
-          <a:bodyPr wrap="square" lIns="0" rIns="0" tIns="0" bIns="0" anchor="t">
+          <a:bodyPr wrap="square" lIns="0" tIns="0" rIns="0" bIns="0" anchor="t">
             <a:spAutoFit/>
           </a:bodyPr>
           <a:lstStyle/>
@@ -5765,7 +5590,7 @@
           <a:noFill/>
         </p:spPr>
         <p:txBody>
-          <a:bodyPr wrap="square" lIns="0" rIns="0" tIns="0" bIns="0" anchor="t">
+          <a:bodyPr wrap="square" lIns="0" tIns="0" rIns="0" bIns="0" anchor="t">
             <a:spAutoFit/>
           </a:bodyPr>
           <a:lstStyle/>
@@ -5831,6 +5656,7 @@
           <a:lstStyle/>
           <a:p>
             <a:pPr algn="ctr"/>
+            <a:endParaRPr/>
           </a:p>
         </p:txBody>
       </p:sp>
@@ -5851,7 +5677,7 @@
           <a:noFill/>
         </p:spPr>
         <p:txBody>
-          <a:bodyPr wrap="square" lIns="0" rIns="0" tIns="0" bIns="0" anchor="t">
+          <a:bodyPr wrap="square" lIns="0" tIns="0" rIns="0" bIns="0" anchor="t">
             <a:spAutoFit/>
           </a:bodyPr>
           <a:lstStyle/>
@@ -5890,7 +5716,7 @@
           <a:noFill/>
         </p:spPr>
         <p:txBody>
-          <a:bodyPr wrap="square" lIns="0" rIns="0" tIns="0" bIns="0" anchor="t">
+          <a:bodyPr wrap="square" lIns="0" tIns="0" rIns="0" bIns="0" anchor="t">
             <a:spAutoFit/>
           </a:bodyPr>
           <a:lstStyle/>
@@ -5929,7 +5755,7 @@
           <a:noFill/>
         </p:spPr>
         <p:txBody>
-          <a:bodyPr wrap="square" lIns="0" rIns="0" tIns="0" bIns="0" anchor="t">
+          <a:bodyPr wrap="square" lIns="0" tIns="0" rIns="0" bIns="0" anchor="t">
             <a:spAutoFit/>
           </a:bodyPr>
           <a:lstStyle/>
@@ -5968,7 +5794,7 @@
           <a:noFill/>
         </p:spPr>
         <p:txBody>
-          <a:bodyPr wrap="square" lIns="0" rIns="0" tIns="0" bIns="0" anchor="t">
+          <a:bodyPr wrap="square" lIns="0" tIns="0" rIns="0" bIns="0" anchor="t">
             <a:spAutoFit/>
           </a:bodyPr>
           <a:lstStyle/>
@@ -6034,6 +5860,7 @@
           <a:lstStyle/>
           <a:p>
             <a:pPr algn="ctr"/>
+            <a:endParaRPr/>
           </a:p>
         </p:txBody>
       </p:sp>
@@ -6054,7 +5881,7 @@
           <a:noFill/>
         </p:spPr>
         <p:txBody>
-          <a:bodyPr wrap="square" lIns="0" rIns="0" tIns="0" bIns="0" anchor="t">
+          <a:bodyPr wrap="square" lIns="0" tIns="0" rIns="0" bIns="0" anchor="t">
             <a:spAutoFit/>
           </a:bodyPr>
           <a:lstStyle/>
@@ -6093,7 +5920,7 @@
           <a:noFill/>
         </p:spPr>
         <p:txBody>
-          <a:bodyPr wrap="square" lIns="0" rIns="0" tIns="0" bIns="0" anchor="t">
+          <a:bodyPr wrap="square" lIns="0" tIns="0" rIns="0" bIns="0" anchor="t">
             <a:spAutoFit/>
           </a:bodyPr>
           <a:lstStyle/>
@@ -6159,6 +5986,7 @@
           <a:lstStyle/>
           <a:p>
             <a:pPr algn="ctr"/>
+            <a:endParaRPr/>
           </a:p>
         </p:txBody>
       </p:sp>
@@ -6179,7 +6007,7 @@
           <a:noFill/>
         </p:spPr>
         <p:txBody>
-          <a:bodyPr wrap="square" lIns="0" rIns="0" tIns="0" bIns="0" anchor="t">
+          <a:bodyPr wrap="square" lIns="0" tIns="0" rIns="0" bIns="0" anchor="t">
             <a:spAutoFit/>
           </a:bodyPr>
           <a:lstStyle/>
@@ -6218,7 +6046,7 @@
           <a:noFill/>
         </p:spPr>
         <p:txBody>
-          <a:bodyPr wrap="square" lIns="0" rIns="0" tIns="0" bIns="0" anchor="t">
+          <a:bodyPr wrap="square" lIns="0" tIns="0" rIns="0" bIns="0" anchor="t">
             <a:spAutoFit/>
           </a:bodyPr>
           <a:lstStyle/>
@@ -6284,6 +6112,7 @@
           <a:lstStyle/>
           <a:p>
             <a:pPr algn="ctr"/>
+            <a:endParaRPr/>
           </a:p>
         </p:txBody>
       </p:sp>
@@ -6304,7 +6133,7 @@
           <a:noFill/>
         </p:spPr>
         <p:txBody>
-          <a:bodyPr wrap="square" lIns="0" rIns="0" tIns="0" bIns="0" anchor="t">
+          <a:bodyPr wrap="square" lIns="0" tIns="0" rIns="0" bIns="0" anchor="t">
             <a:spAutoFit/>
           </a:bodyPr>
           <a:lstStyle/>
@@ -6343,7 +6172,7 @@
           <a:noFill/>
         </p:spPr>
         <p:txBody>
-          <a:bodyPr wrap="square" lIns="0" rIns="0" tIns="0" bIns="0" anchor="t">
+          <a:bodyPr wrap="square" lIns="0" tIns="0" rIns="0" bIns="0" anchor="t">
             <a:spAutoFit/>
           </a:bodyPr>
           <a:lstStyle/>
@@ -6411,6 +6240,7 @@
           <a:lstStyle/>
           <a:p>
             <a:pPr algn="ctr"/>
+            <a:endParaRPr/>
           </a:p>
         </p:txBody>
       </p:sp>
@@ -6455,6 +6285,7 @@
           <a:lstStyle/>
           <a:p>
             <a:pPr algn="ctr"/>
+            <a:endParaRPr/>
           </a:p>
         </p:txBody>
       </p:sp>
@@ -6475,7 +6306,7 @@
           <a:noFill/>
         </p:spPr>
         <p:txBody>
-          <a:bodyPr wrap="square" lIns="0" rIns="0" tIns="0" bIns="0" anchor="t">
+          <a:bodyPr wrap="square" lIns="0" tIns="0" rIns="0" bIns="0" anchor="t">
             <a:spAutoFit/>
           </a:bodyPr>
           <a:lstStyle/>
@@ -6514,7 +6345,7 @@
           <a:noFill/>
         </p:spPr>
         <p:txBody>
-          <a:bodyPr wrap="square" lIns="0" rIns="0" tIns="0" bIns="0" anchor="t">
+          <a:bodyPr wrap="square" lIns="0" tIns="0" rIns="0" bIns="0" anchor="t">
             <a:spAutoFit/>
           </a:bodyPr>
           <a:lstStyle/>
@@ -6582,6 +6413,7 @@
           <a:lstStyle/>
           <a:p>
             <a:pPr algn="ctr"/>
+            <a:endParaRPr/>
           </a:p>
         </p:txBody>
       </p:sp>
@@ -6626,6 +6458,7 @@
           <a:lstStyle/>
           <a:p>
             <a:pPr algn="ctr"/>
+            <a:endParaRPr/>
           </a:p>
         </p:txBody>
       </p:sp>
@@ -6646,7 +6479,7 @@
           <a:noFill/>
         </p:spPr>
         <p:txBody>
-          <a:bodyPr wrap="square" lIns="0" rIns="0" tIns="0" bIns="0" anchor="t">
+          <a:bodyPr wrap="square" lIns="0" tIns="0" rIns="0" bIns="0" anchor="t">
             <a:spAutoFit/>
           </a:bodyPr>
           <a:lstStyle/>
@@ -6685,7 +6518,7 @@
           <a:noFill/>
         </p:spPr>
         <p:txBody>
-          <a:bodyPr wrap="square" lIns="0" rIns="0" tIns="0" bIns="0" anchor="t">
+          <a:bodyPr wrap="square" lIns="0" tIns="0" rIns="0" bIns="0" anchor="t">
             <a:spAutoFit/>
           </a:bodyPr>
           <a:lstStyle/>
@@ -6753,6 +6586,7 @@
           <a:lstStyle/>
           <a:p>
             <a:pPr algn="ctr"/>
+            <a:endParaRPr/>
           </a:p>
         </p:txBody>
       </p:sp>
@@ -6797,6 +6631,7 @@
           <a:lstStyle/>
           <a:p>
             <a:pPr algn="ctr"/>
+            <a:endParaRPr/>
           </a:p>
         </p:txBody>
       </p:sp>
@@ -6817,7 +6652,7 @@
           <a:noFill/>
         </p:spPr>
         <p:txBody>
-          <a:bodyPr wrap="square" lIns="0" rIns="0" tIns="0" bIns="0" anchor="t">
+          <a:bodyPr wrap="square" lIns="0" tIns="0" rIns="0" bIns="0" anchor="t">
             <a:spAutoFit/>
           </a:bodyPr>
           <a:lstStyle/>
@@ -6856,7 +6691,7 @@
           <a:noFill/>
         </p:spPr>
         <p:txBody>
-          <a:bodyPr wrap="square" lIns="0" rIns="0" tIns="0" bIns="0" anchor="t">
+          <a:bodyPr wrap="square" lIns="0" tIns="0" rIns="0" bIns="0" anchor="t">
             <a:spAutoFit/>
           </a:bodyPr>
           <a:lstStyle/>
@@ -6898,7 +6733,7 @@
           <a:noFill/>
         </p:spPr>
         <p:txBody>
-          <a:bodyPr wrap="square" lIns="0" rIns="0" tIns="0" bIns="0" anchor="t">
+          <a:bodyPr wrap="square" lIns="0" tIns="0" rIns="0" bIns="0" anchor="t">
             <a:spAutoFit/>
           </a:bodyPr>
           <a:lstStyle/>
@@ -6941,7 +6776,7 @@
 </file>
 
 <file path=ppt/slides/slide12.xml><?xml version="1.0" encoding="utf-8"?>
-<p:sld xmlns:a="http://schemas.openxmlformats.org/drawingml/2006/main" xmlns:p="http://schemas.openxmlformats.org/presentationml/2006/main" xmlns:r="http://schemas.openxmlformats.org/officeDocument/2006/relationships">
+<p:sld xmlns:a="http://schemas.openxmlformats.org/drawingml/2006/main" xmlns:r="http://schemas.openxmlformats.org/officeDocument/2006/relationships" xmlns:p="http://schemas.openxmlformats.org/presentationml/2006/main">
   <p:cSld>
     <p:spTree>
       <p:nvGrpSpPr>
@@ -6949,7 +6784,14 @@
         <p:cNvGrpSpPr/>
         <p:nvPr/>
       </p:nvGrpSpPr>
-      <p:grpSpPr/>
+      <p:grpSpPr>
+        <a:xfrm>
+          <a:off x="0" y="0"/>
+          <a:ext cx="0" cy="0"/>
+          <a:chOff x="0" y="0"/>
+          <a:chExt cx="0" cy="0"/>
+        </a:xfrm>
+      </p:grpSpPr>
       <p:sp>
         <p:nvSpPr>
           <p:cNvPr id="2" name="Rectangle 1"/>
@@ -6991,6 +6833,7 @@
           <a:lstStyle/>
           <a:p>
             <a:pPr algn="ctr"/>
+            <a:endParaRPr/>
           </a:p>
         </p:txBody>
       </p:sp>
@@ -7035,6 +6878,7 @@
           <a:lstStyle/>
           <a:p>
             <a:pPr algn="ctr"/>
+            <a:endParaRPr/>
           </a:p>
         </p:txBody>
       </p:sp>
@@ -7055,7 +6899,7 @@
           <a:noFill/>
         </p:spPr>
         <p:txBody>
-          <a:bodyPr wrap="square" lIns="0" rIns="0" tIns="0" bIns="0" anchor="t">
+          <a:bodyPr wrap="square" lIns="0" tIns="0" rIns="0" bIns="0" anchor="t">
             <a:spAutoFit/>
           </a:bodyPr>
           <a:lstStyle/>
@@ -7098,7 +6942,7 @@
           <a:noFill/>
         </p:spPr>
         <p:txBody>
-          <a:bodyPr wrap="square" lIns="0" rIns="0" tIns="0" bIns="0" anchor="t">
+          <a:bodyPr wrap="square" lIns="0" tIns="0" rIns="0" bIns="0" anchor="t">
             <a:spAutoFit/>
           </a:bodyPr>
           <a:lstStyle/>
@@ -7164,6 +7008,7 @@
           <a:lstStyle/>
           <a:p>
             <a:pPr algn="ctr"/>
+            <a:endParaRPr/>
           </a:p>
         </p:txBody>
       </p:sp>
@@ -7184,7 +7029,7 @@
           <a:noFill/>
         </p:spPr>
         <p:txBody>
-          <a:bodyPr wrap="square" lIns="0" rIns="0" tIns="0" bIns="0" anchor="t">
+          <a:bodyPr wrap="square" lIns="0" tIns="0" rIns="0" bIns="0" anchor="t">
             <a:spAutoFit/>
           </a:bodyPr>
           <a:lstStyle/>
@@ -7239,7 +7084,7 @@
           <a:noFill/>
         </p:spPr>
         <p:txBody>
-          <a:bodyPr wrap="square" lIns="0" rIns="0" tIns="0" bIns="0" anchor="t">
+          <a:bodyPr wrap="square" lIns="0" tIns="0" rIns="0" bIns="0" anchor="t">
             <a:spAutoFit/>
           </a:bodyPr>
           <a:lstStyle/>
@@ -7278,7 +7123,7 @@
           <a:noFill/>
         </p:spPr>
         <p:txBody>
-          <a:bodyPr wrap="square" lIns="0" rIns="0" tIns="0" bIns="0" anchor="t">
+          <a:bodyPr wrap="square" lIns="0" tIns="0" rIns="0" bIns="0" anchor="t">
             <a:spAutoFit/>
           </a:bodyPr>
           <a:lstStyle/>
@@ -7309,7 +7154,7 @@
 </file>
 
 <file path=ppt/slides/slide2.xml><?xml version="1.0" encoding="utf-8"?>
-<p:sld xmlns:a="http://schemas.openxmlformats.org/drawingml/2006/main" xmlns:p="http://schemas.openxmlformats.org/presentationml/2006/main" xmlns:r="http://schemas.openxmlformats.org/officeDocument/2006/relationships">
+<p:sld xmlns:a="http://schemas.openxmlformats.org/drawingml/2006/main" xmlns:r="http://schemas.openxmlformats.org/officeDocument/2006/relationships" xmlns:p="http://schemas.openxmlformats.org/presentationml/2006/main">
   <p:cSld>
     <p:spTree>
       <p:nvGrpSpPr>
@@ -7317,7 +7162,14 @@
         <p:cNvGrpSpPr/>
         <p:nvPr/>
       </p:nvGrpSpPr>
-      <p:grpSpPr/>
+      <p:grpSpPr>
+        <a:xfrm>
+          <a:off x="0" y="0"/>
+          <a:ext cx="0" cy="0"/>
+          <a:chOff x="0" y="0"/>
+          <a:chExt cx="0" cy="0"/>
+        </a:xfrm>
+      </p:grpSpPr>
       <p:sp>
         <p:nvSpPr>
           <p:cNvPr id="2" name="Rectangle 1"/>
@@ -7359,6 +7211,7 @@
           <a:lstStyle/>
           <a:p>
             <a:pPr algn="ctr"/>
+            <a:endParaRPr/>
           </a:p>
         </p:txBody>
       </p:sp>
@@ -7403,6 +7256,7 @@
           <a:lstStyle/>
           <a:p>
             <a:pPr algn="ctr"/>
+            <a:endParaRPr/>
           </a:p>
         </p:txBody>
       </p:sp>
@@ -7423,7 +7277,7 @@
           <a:noFill/>
         </p:spPr>
         <p:txBody>
-          <a:bodyPr wrap="square" lIns="0" rIns="0" tIns="0" bIns="0" anchor="t">
+          <a:bodyPr wrap="square" lIns="0" tIns="0" rIns="0" bIns="0" anchor="t">
             <a:spAutoFit/>
           </a:bodyPr>
           <a:lstStyle/>
@@ -7462,7 +7316,7 @@
           <a:noFill/>
         </p:spPr>
         <p:txBody>
-          <a:bodyPr wrap="square" lIns="0" rIns="0" tIns="0" bIns="0" anchor="t">
+          <a:bodyPr wrap="square" lIns="0" tIns="0" rIns="0" bIns="0" anchor="t">
             <a:spAutoFit/>
           </a:bodyPr>
           <a:lstStyle/>
@@ -7496,15 +7350,15 @@
         <p:spPr>
           <a:xfrm>
             <a:off x="914400" y="3465576"/>
-            <a:ext cx="8778240" cy="731520"/>
-          </a:xfrm>
-          <a:prstGeom prst="rect">
-            <a:avLst/>
-          </a:prstGeom>
-          <a:noFill/>
-        </p:spPr>
-        <p:txBody>
-          <a:bodyPr wrap="square" lIns="0" rIns="0" tIns="0" bIns="0" anchor="t">
+            <a:ext cx="8778240" cy="1099275"/>
+          </a:xfrm>
+          <a:prstGeom prst="rect">
+            <a:avLst/>
+          </a:prstGeom>
+          <a:noFill/>
+        </p:spPr>
+        <p:txBody>
+          <a:bodyPr wrap="square" lIns="0" tIns="0" rIns="0" bIns="0" anchor="t">
             <a:spAutoFit/>
           </a:bodyPr>
           <a:lstStyle/>
@@ -7518,14 +7372,65 @@
               </a:spcAft>
             </a:pPr>
             <a:r>
-              <a:rPr sz="1600" b="0" i="0">
+              <a:rPr sz="2800" b="0" i="0" dirty="0">
                 <a:solidFill>
                   <a:srgbClr val="CDCAC5"/>
                 </a:solidFill>
                 <a:latin typeface="Segoe UI"/>
               </a:rPr>
-              <a:t>Enterprises have been handed a new kind of worker, and no way to hold it accountable.</a:t>
-            </a:r>
+              <a:t>Enterprises have been handed a new </a:t>
+            </a:r>
+            <a:r>
+              <a:rPr lang="en-US" sz="2800" b="0" i="0" dirty="0">
+                <a:solidFill>
+                  <a:srgbClr val="CDCAC5"/>
+                </a:solidFill>
+                <a:latin typeface="Segoe UI"/>
+              </a:rPr>
+              <a:t>AI </a:t>
+            </a:r>
+            <a:r>
+              <a:rPr sz="2800" b="0" i="0" dirty="0">
+                <a:solidFill>
+                  <a:srgbClr val="CDCAC5"/>
+                </a:solidFill>
+                <a:latin typeface="Segoe UI"/>
+              </a:rPr>
+              <a:t>worker, </a:t>
+            </a:r>
+            <a:r>
+              <a:rPr lang="en-US" sz="2800" b="0" i="0" dirty="0">
+                <a:solidFill>
+                  <a:srgbClr val="CDCAC5"/>
+                </a:solidFill>
+                <a:latin typeface="Segoe UI"/>
+              </a:rPr>
+              <a:t>but how do we</a:t>
+            </a:r>
+            <a:r>
+              <a:rPr sz="2800" b="0" i="0" dirty="0">
+                <a:solidFill>
+                  <a:srgbClr val="CDCAC5"/>
+                </a:solidFill>
+                <a:latin typeface="Segoe UI"/>
+              </a:rPr>
+              <a:t> hold it accountable</a:t>
+            </a:r>
+            <a:r>
+              <a:rPr lang="en-US" sz="2800" b="0" i="0" dirty="0">
+                <a:solidFill>
+                  <a:srgbClr val="CDCAC5"/>
+                </a:solidFill>
+                <a:latin typeface="Segoe UI"/>
+              </a:rPr>
+              <a:t>?</a:t>
+            </a:r>
+            <a:endParaRPr sz="2800" b="0" i="0" dirty="0">
+              <a:solidFill>
+                <a:srgbClr val="CDCAC5"/>
+              </a:solidFill>
+              <a:latin typeface="Segoe UI"/>
+            </a:endParaRPr>
           </a:p>
         </p:txBody>
       </p:sp>
@@ -7546,7 +7451,7 @@
           <a:noFill/>
         </p:spPr>
         <p:txBody>
-          <a:bodyPr wrap="square" lIns="0" rIns="0" tIns="0" bIns="0" anchor="t">
+          <a:bodyPr wrap="square" lIns="0" tIns="0" rIns="0" bIns="0" anchor="t">
             <a:spAutoFit/>
           </a:bodyPr>
           <a:lstStyle/>
@@ -7585,7 +7490,7 @@
           <a:noFill/>
         </p:spPr>
         <p:txBody>
-          <a:bodyPr wrap="square" lIns="0" rIns="0" tIns="0" bIns="0" anchor="t">
+          <a:bodyPr wrap="square" lIns="0" tIns="0" rIns="0" bIns="0" anchor="t">
             <a:spAutoFit/>
           </a:bodyPr>
           <a:lstStyle/>
@@ -7616,7 +7521,7 @@
 </file>
 
 <file path=ppt/slides/slide3.xml><?xml version="1.0" encoding="utf-8"?>
-<p:sld xmlns:a="http://schemas.openxmlformats.org/drawingml/2006/main" xmlns:p="http://schemas.openxmlformats.org/presentationml/2006/main" xmlns:r="http://schemas.openxmlformats.org/officeDocument/2006/relationships">
+<p:sld xmlns:a="http://schemas.openxmlformats.org/drawingml/2006/main" xmlns:r="http://schemas.openxmlformats.org/officeDocument/2006/relationships" xmlns:p="http://schemas.openxmlformats.org/presentationml/2006/main">
   <p:cSld>
     <p:spTree>
       <p:nvGrpSpPr>
@@ -7624,7 +7529,14 @@
         <p:cNvGrpSpPr/>
         <p:nvPr/>
       </p:nvGrpSpPr>
-      <p:grpSpPr/>
+      <p:grpSpPr>
+        <a:xfrm>
+          <a:off x="0" y="0"/>
+          <a:ext cx="0" cy="0"/>
+          <a:chOff x="0" y="0"/>
+          <a:chExt cx="0" cy="0"/>
+        </a:xfrm>
+      </p:grpSpPr>
       <p:sp>
         <p:nvSpPr>
           <p:cNvPr id="2" name="Rectangle 1"/>
@@ -7666,6 +7578,7 @@
           <a:lstStyle/>
           <a:p>
             <a:pPr algn="ctr"/>
+            <a:endParaRPr/>
           </a:p>
         </p:txBody>
       </p:sp>
@@ -7686,7 +7599,7 @@
           <a:noFill/>
         </p:spPr>
         <p:txBody>
-          <a:bodyPr wrap="square" lIns="0" rIns="0" tIns="0" bIns="0" anchor="t">
+          <a:bodyPr wrap="square" lIns="0" tIns="0" rIns="0" bIns="0" anchor="t">
             <a:spAutoFit/>
           </a:bodyPr>
           <a:lstStyle/>
@@ -7717,15 +7630,15 @@
         <p:spPr>
           <a:xfrm>
             <a:off x="914400" y="950976"/>
-            <a:ext cx="10362895" cy="1060704"/>
-          </a:xfrm>
-          <a:prstGeom prst="rect">
-            <a:avLst/>
-          </a:prstGeom>
-          <a:noFill/>
-        </p:spPr>
-        <p:txBody>
-          <a:bodyPr wrap="square" lIns="0" rIns="0" tIns="0" bIns="0" anchor="t">
+            <a:ext cx="10362895" cy="1071640"/>
+          </a:xfrm>
+          <a:prstGeom prst="rect">
+            <a:avLst/>
+          </a:prstGeom>
+          <a:noFill/>
+        </p:spPr>
+        <p:txBody>
+          <a:bodyPr wrap="square" lIns="0" tIns="0" rIns="0" bIns="0" anchor="t">
             <a:spAutoFit/>
           </a:bodyPr>
           <a:lstStyle/>
@@ -7739,13 +7652,31 @@
               </a:spcAft>
             </a:pPr>
             <a:r>
-              <a:rPr sz="3400" b="0" i="0">
+              <a:rPr sz="3400" b="0" i="0" dirty="0">
                 <a:solidFill>
                   <a:srgbClr val="1C1712"/>
                 </a:solidFill>
                 <a:latin typeface="Georgia"/>
               </a:rPr>
-              <a:t>Almost everyone has bought. Almost nobody has shipped.</a:t>
+              <a:t>Almost everyone has bought</a:t>
+            </a:r>
+            <a:r>
+              <a:rPr lang="en-US" sz="3400" b="0" i="0" dirty="0">
+                <a:solidFill>
+                  <a:srgbClr val="1C1712"/>
+                </a:solidFill>
+                <a:latin typeface="Georgia"/>
+              </a:rPr>
+              <a:t> AI</a:t>
+            </a:r>
+            <a:r>
+              <a:rPr sz="3400" b="0" i="0" dirty="0">
+                <a:solidFill>
+                  <a:srgbClr val="1C1712"/>
+                </a:solidFill>
+                <a:latin typeface="Georgia"/>
+              </a:rPr>
+              <a:t>. Almost nobody has shipped.</a:t>
             </a:r>
           </a:p>
         </p:txBody>
@@ -7791,6 +7722,7 @@
           <a:lstStyle/>
           <a:p>
             <a:pPr algn="ctr"/>
+            <a:endParaRPr/>
           </a:p>
         </p:txBody>
       </p:sp>
@@ -7811,7 +7743,7 @@
           <a:noFill/>
         </p:spPr>
         <p:txBody>
-          <a:bodyPr wrap="square" lIns="0" rIns="0" tIns="0" bIns="0" anchor="t">
+          <a:bodyPr wrap="square" lIns="0" tIns="0" rIns="0" bIns="0" anchor="t">
             <a:spAutoFit/>
           </a:bodyPr>
           <a:lstStyle/>
@@ -7850,7 +7782,7 @@
           <a:noFill/>
         </p:spPr>
         <p:txBody>
-          <a:bodyPr wrap="square" lIns="0" rIns="0" tIns="0" bIns="0" anchor="t">
+          <a:bodyPr wrap="square" lIns="0" tIns="0" rIns="0" bIns="0" anchor="t">
             <a:spAutoFit/>
           </a:bodyPr>
           <a:lstStyle/>
@@ -7915,6 +7847,7 @@
           <a:lstStyle/>
           <a:p>
             <a:pPr algn="ctr"/>
+            <a:endParaRPr/>
           </a:p>
         </p:txBody>
       </p:sp>
@@ -7935,7 +7868,7 @@
           <a:noFill/>
         </p:spPr>
         <p:txBody>
-          <a:bodyPr wrap="square" lIns="0" rIns="0" tIns="0" bIns="0" anchor="t">
+          <a:bodyPr wrap="square" lIns="0" tIns="0" rIns="0" bIns="0" anchor="t">
             <a:spAutoFit/>
           </a:bodyPr>
           <a:lstStyle/>
@@ -7974,7 +7907,7 @@
           <a:noFill/>
         </p:spPr>
         <p:txBody>
-          <a:bodyPr wrap="square" lIns="0" rIns="0" tIns="0" bIns="0" anchor="t">
+          <a:bodyPr wrap="square" lIns="0" tIns="0" rIns="0" bIns="0" anchor="t">
             <a:spAutoFit/>
           </a:bodyPr>
           <a:lstStyle/>
@@ -8042,6 +7975,7 @@
           <a:lstStyle/>
           <a:p>
             <a:pPr algn="ctr"/>
+            <a:endParaRPr/>
           </a:p>
         </p:txBody>
       </p:sp>
@@ -8062,7 +7996,7 @@
           <a:noFill/>
         </p:spPr>
         <p:txBody>
-          <a:bodyPr wrap="square" lIns="0" rIns="0" tIns="0" bIns="0" anchor="t">
+          <a:bodyPr wrap="square" lIns="0" tIns="0" rIns="0" bIns="0" anchor="t">
             <a:spAutoFit/>
           </a:bodyPr>
           <a:lstStyle/>
@@ -8101,7 +8035,7 @@
           <a:noFill/>
         </p:spPr>
         <p:txBody>
-          <a:bodyPr wrap="square" lIns="0" rIns="0" tIns="0" bIns="0" anchor="t">
+          <a:bodyPr wrap="square" lIns="0" tIns="0" rIns="0" bIns="0" anchor="t">
             <a:spAutoFit/>
           </a:bodyPr>
           <a:lstStyle/>
@@ -8143,7 +8077,7 @@
           <a:noFill/>
         </p:spPr>
         <p:txBody>
-          <a:bodyPr wrap="square" lIns="0" rIns="0" tIns="0" bIns="0" anchor="t">
+          <a:bodyPr wrap="square" lIns="0" tIns="0" rIns="0" bIns="0" anchor="t">
             <a:spAutoFit/>
           </a:bodyPr>
           <a:lstStyle/>
@@ -8203,7 +8137,7 @@
           <a:noFill/>
         </p:spPr>
         <p:txBody>
-          <a:bodyPr wrap="square" lIns="0" rIns="0" tIns="0" bIns="0" anchor="t">
+          <a:bodyPr wrap="square" lIns="0" tIns="0" rIns="0" bIns="0" anchor="t">
             <a:spAutoFit/>
           </a:bodyPr>
           <a:lstStyle/>
@@ -8237,7 +8171,7 @@
 </file>
 
 <file path=ppt/slides/slide4.xml><?xml version="1.0" encoding="utf-8"?>
-<p:sld xmlns:a="http://schemas.openxmlformats.org/drawingml/2006/main" xmlns:p="http://schemas.openxmlformats.org/presentationml/2006/main" xmlns:r="http://schemas.openxmlformats.org/officeDocument/2006/relationships">
+<p:sld xmlns:a="http://schemas.openxmlformats.org/drawingml/2006/main" xmlns:r="http://schemas.openxmlformats.org/officeDocument/2006/relationships" xmlns:p="http://schemas.openxmlformats.org/presentationml/2006/main">
   <p:cSld>
     <p:spTree>
       <p:nvGrpSpPr>
@@ -8245,7 +8179,14 @@
         <p:cNvGrpSpPr/>
         <p:nvPr/>
       </p:nvGrpSpPr>
-      <p:grpSpPr/>
+      <p:grpSpPr>
+        <a:xfrm>
+          <a:off x="0" y="0"/>
+          <a:ext cx="0" cy="0"/>
+          <a:chOff x="0" y="0"/>
+          <a:chExt cx="0" cy="0"/>
+        </a:xfrm>
+      </p:grpSpPr>
       <p:sp>
         <p:nvSpPr>
           <p:cNvPr id="2" name="Rectangle 1"/>
@@ -8287,6 +8228,7 @@
           <a:lstStyle/>
           <a:p>
             <a:pPr algn="ctr"/>
+            <a:endParaRPr/>
           </a:p>
         </p:txBody>
       </p:sp>
@@ -8307,7 +8249,7 @@
           <a:noFill/>
         </p:spPr>
         <p:txBody>
-          <a:bodyPr wrap="square" lIns="0" rIns="0" tIns="0" bIns="0" anchor="t">
+          <a:bodyPr wrap="square" lIns="0" tIns="0" rIns="0" bIns="0" anchor="t">
             <a:spAutoFit/>
           </a:bodyPr>
           <a:lstStyle/>
@@ -8338,15 +8280,15 @@
         <p:spPr>
           <a:xfrm>
             <a:off x="914400" y="950976"/>
-            <a:ext cx="10362895" cy="1060704"/>
-          </a:xfrm>
-          <a:prstGeom prst="rect">
-            <a:avLst/>
-          </a:prstGeom>
-          <a:noFill/>
-        </p:spPr>
-        <p:txBody>
-          <a:bodyPr wrap="square" lIns="0" rIns="0" tIns="0" bIns="0" anchor="t">
+            <a:ext cx="10362895" cy="517001"/>
+          </a:xfrm>
+          <a:prstGeom prst="rect">
+            <a:avLst/>
+          </a:prstGeom>
+          <a:noFill/>
+        </p:spPr>
+        <p:txBody>
+          <a:bodyPr wrap="square" lIns="0" tIns="0" rIns="0" bIns="0" anchor="t">
             <a:spAutoFit/>
           </a:bodyPr>
           <a:lstStyle/>
@@ -8360,13 +8302,31 @@
               </a:spcAft>
             </a:pPr>
             <a:r>
-              <a:rPr sz="3400" b="0" i="0">
+              <a:rPr sz="3400" b="0" i="0" dirty="0">
                 <a:solidFill>
                   <a:srgbClr val="1C1712"/>
                 </a:solidFill>
                 <a:latin typeface="Georgia"/>
               </a:rPr>
-              <a:t>The money leaves, and she finds out sixty days later.</a:t>
+              <a:t>The money leaves, and </a:t>
+            </a:r>
+            <a:r>
+              <a:rPr lang="en-US" sz="3400" dirty="0">
+                <a:solidFill>
+                  <a:srgbClr val="1C1712"/>
+                </a:solidFill>
+                <a:latin typeface="Georgia"/>
+              </a:rPr>
+              <a:t>you</a:t>
+            </a:r>
+            <a:r>
+              <a:rPr sz="3400" b="0" i="0" dirty="0">
+                <a:solidFill>
+                  <a:srgbClr val="1C1712"/>
+                </a:solidFill>
+                <a:latin typeface="Georgia"/>
+              </a:rPr>
+              <a:t> find out sixty days later.</a:t>
             </a:r>
           </a:p>
         </p:txBody>
@@ -8412,6 +8372,7 @@
           <a:lstStyle/>
           <a:p>
             <a:pPr algn="ctr"/>
+            <a:endParaRPr/>
           </a:p>
         </p:txBody>
       </p:sp>
@@ -8432,7 +8393,7 @@
           <a:noFill/>
         </p:spPr>
         <p:txBody>
-          <a:bodyPr wrap="square" lIns="0" rIns="0" tIns="0" bIns="0" anchor="t">
+          <a:bodyPr wrap="square" lIns="0" tIns="0" rIns="0" bIns="0" anchor="t">
             <a:spAutoFit/>
           </a:bodyPr>
           <a:lstStyle/>
@@ -8471,7 +8432,7 @@
           <a:noFill/>
         </p:spPr>
         <p:txBody>
-          <a:bodyPr wrap="square" lIns="0" rIns="0" tIns="0" bIns="0" anchor="t">
+          <a:bodyPr wrap="square" lIns="0" tIns="0" rIns="0" bIns="0" anchor="t">
             <a:spAutoFit/>
           </a:bodyPr>
           <a:lstStyle/>
@@ -8510,7 +8471,7 @@
           <a:noFill/>
         </p:spPr>
         <p:txBody>
-          <a:bodyPr wrap="square" lIns="0" rIns="0" tIns="0" bIns="0" anchor="t">
+          <a:bodyPr wrap="square" lIns="0" tIns="0" rIns="0" bIns="0" anchor="t">
             <a:spAutoFit/>
           </a:bodyPr>
           <a:lstStyle/>
@@ -8615,6 +8576,7 @@
           <a:lstStyle/>
           <a:p>
             <a:pPr algn="ctr"/>
+            <a:endParaRPr/>
           </a:p>
         </p:txBody>
       </p:sp>
@@ -8635,7 +8597,7 @@
           <a:noFill/>
         </p:spPr>
         <p:txBody>
-          <a:bodyPr wrap="square" lIns="0" rIns="0" tIns="0" bIns="0" anchor="t">
+          <a:bodyPr wrap="square" lIns="0" tIns="0" rIns="0" bIns="0" anchor="t">
             <a:spAutoFit/>
           </a:bodyPr>
           <a:lstStyle/>
@@ -8698,6 +8660,7 @@
           <a:lstStyle/>
           <a:p>
             <a:pPr algn="ctr"/>
+            <a:endParaRPr/>
           </a:p>
         </p:txBody>
       </p:sp>
@@ -8718,7 +8681,7 @@
           <a:noFill/>
         </p:spPr>
         <p:txBody>
-          <a:bodyPr wrap="square" lIns="0" rIns="0" tIns="0" bIns="0" anchor="t">
+          <a:bodyPr wrap="square" lIns="0" tIns="0" rIns="0" bIns="0" anchor="t">
             <a:spAutoFit/>
           </a:bodyPr>
           <a:lstStyle/>
@@ -8784,6 +8747,7 @@
           <a:lstStyle/>
           <a:p>
             <a:pPr algn="ctr"/>
+            <a:endParaRPr/>
           </a:p>
         </p:txBody>
       </p:sp>
@@ -8804,7 +8768,7 @@
           <a:noFill/>
         </p:spPr>
         <p:txBody>
-          <a:bodyPr wrap="square" lIns="0" rIns="0" tIns="0" bIns="0" anchor="t">
+          <a:bodyPr wrap="square" lIns="0" tIns="0" rIns="0" bIns="0" anchor="t">
             <a:spAutoFit/>
           </a:bodyPr>
           <a:lstStyle/>
@@ -8870,6 +8834,7 @@
           <a:lstStyle/>
           <a:p>
             <a:pPr algn="ctr"/>
+            <a:endParaRPr/>
           </a:p>
         </p:txBody>
       </p:sp>
@@ -8890,7 +8855,7 @@
           <a:noFill/>
         </p:spPr>
         <p:txBody>
-          <a:bodyPr wrap="square" lIns="0" rIns="0" tIns="0" bIns="0" anchor="t">
+          <a:bodyPr wrap="square" lIns="0" tIns="0" rIns="0" bIns="0" anchor="t">
             <a:spAutoFit/>
           </a:bodyPr>
           <a:lstStyle/>
@@ -8923,16 +8888,16 @@
         </p:nvSpPr>
         <p:spPr>
           <a:xfrm>
-            <a:off x="914400" y="4928616"/>
-            <a:ext cx="10362895" cy="640080"/>
-          </a:xfrm>
-          <a:prstGeom prst="rect">
-            <a:avLst/>
-          </a:prstGeom>
-          <a:noFill/>
-        </p:spPr>
-        <p:txBody>
-          <a:bodyPr wrap="square" lIns="0" rIns="0" tIns="0" bIns="0" anchor="t">
+            <a:off x="914400" y="4992624"/>
+            <a:ext cx="10362895" cy="332720"/>
+          </a:xfrm>
+          <a:prstGeom prst="rect">
+            <a:avLst/>
+          </a:prstGeom>
+          <a:noFill/>
+        </p:spPr>
+        <p:txBody>
+          <a:bodyPr wrap="square" lIns="0" tIns="0" rIns="0" bIns="0" anchor="t">
             <a:spAutoFit/>
           </a:bodyPr>
           <a:lstStyle/>
@@ -8946,13 +8911,31 @@
               </a:spcAft>
             </a:pPr>
             <a:r>
-              <a:rPr sz="1800" b="1" i="0">
+              <a:rPr sz="1800" b="1" i="0" dirty="0">
                 <a:solidFill>
                   <a:srgbClr val="1C1712"/>
                 </a:solidFill>
                 <a:latin typeface="Segoe UI"/>
               </a:rPr>
-              <a:t>She does not need a smarter model. She needs a name on the decision.</a:t>
+              <a:t>She does not need a smarter model. She needs a name </a:t>
+            </a:r>
+            <a:r>
+              <a:rPr lang="en-US" sz="1800" b="1" i="0" dirty="0">
+                <a:solidFill>
+                  <a:srgbClr val="1C1712"/>
+                </a:solidFill>
+                <a:latin typeface="Segoe UI"/>
+              </a:rPr>
+              <a:t>to hold accountable</a:t>
+            </a:r>
+            <a:r>
+              <a:rPr sz="1800" b="1" i="0" dirty="0">
+                <a:solidFill>
+                  <a:srgbClr val="1C1712"/>
+                </a:solidFill>
+                <a:latin typeface="Segoe UI"/>
+              </a:rPr>
+              <a:t>.</a:t>
             </a:r>
           </a:p>
         </p:txBody>
@@ -8974,7 +8957,7 @@
           <a:noFill/>
         </p:spPr>
         <p:txBody>
-          <a:bodyPr wrap="square" lIns="0" rIns="0" tIns="0" bIns="0" anchor="t">
+          <a:bodyPr wrap="square" lIns="0" tIns="0" rIns="0" bIns="0" anchor="t">
             <a:spAutoFit/>
           </a:bodyPr>
           <a:lstStyle/>
@@ -9008,7 +8991,7 @@
 </file>
 
 <file path=ppt/slides/slide5.xml><?xml version="1.0" encoding="utf-8"?>
-<p:sld xmlns:a="http://schemas.openxmlformats.org/drawingml/2006/main" xmlns:p="http://schemas.openxmlformats.org/presentationml/2006/main" xmlns:r="http://schemas.openxmlformats.org/officeDocument/2006/relationships">
+<p:sld xmlns:a="http://schemas.openxmlformats.org/drawingml/2006/main" xmlns:r="http://schemas.openxmlformats.org/officeDocument/2006/relationships" xmlns:p="http://schemas.openxmlformats.org/presentationml/2006/main">
   <p:cSld>
     <p:spTree>
       <p:nvGrpSpPr>
@@ -9016,7 +8999,14 @@
         <p:cNvGrpSpPr/>
         <p:nvPr/>
       </p:nvGrpSpPr>
-      <p:grpSpPr/>
+      <p:grpSpPr>
+        <a:xfrm>
+          <a:off x="0" y="0"/>
+          <a:ext cx="0" cy="0"/>
+          <a:chOff x="0" y="0"/>
+          <a:chExt cx="0" cy="0"/>
+        </a:xfrm>
+      </p:grpSpPr>
       <p:sp>
         <p:nvSpPr>
           <p:cNvPr id="2" name="Rectangle 1"/>
@@ -9058,6 +9048,7 @@
           <a:lstStyle/>
           <a:p>
             <a:pPr algn="ctr"/>
+            <a:endParaRPr/>
           </a:p>
         </p:txBody>
       </p:sp>
@@ -9102,6 +9093,7 @@
           <a:lstStyle/>
           <a:p>
             <a:pPr algn="ctr"/>
+            <a:endParaRPr/>
           </a:p>
         </p:txBody>
       </p:sp>
@@ -9122,7 +9114,7 @@
           <a:noFill/>
         </p:spPr>
         <p:txBody>
-          <a:bodyPr wrap="square" lIns="0" rIns="0" tIns="0" bIns="0" anchor="t">
+          <a:bodyPr wrap="square" lIns="0" tIns="0" rIns="0" bIns="0" anchor="t">
             <a:spAutoFit/>
           </a:bodyPr>
           <a:lstStyle/>
@@ -9161,7 +9153,7 @@
           <a:noFill/>
         </p:spPr>
         <p:txBody>
-          <a:bodyPr wrap="square" lIns="0" rIns="0" tIns="0" bIns="0" anchor="t">
+          <a:bodyPr wrap="square" lIns="0" tIns="0" rIns="0" bIns="0" anchor="t">
             <a:spAutoFit/>
           </a:bodyPr>
           <a:lstStyle/>
@@ -9195,15 +9187,15 @@
         <p:spPr>
           <a:xfrm>
             <a:off x="914400" y="3465576"/>
-            <a:ext cx="8778240" cy="731520"/>
-          </a:xfrm>
-          <a:prstGeom prst="rect">
-            <a:avLst/>
-          </a:prstGeom>
-          <a:noFill/>
-        </p:spPr>
-        <p:txBody>
-          <a:bodyPr wrap="square" lIns="0" rIns="0" tIns="0" bIns="0" anchor="t">
+            <a:ext cx="8778240" cy="1256306"/>
+          </a:xfrm>
+          <a:prstGeom prst="rect">
+            <a:avLst/>
+          </a:prstGeom>
+          <a:noFill/>
+        </p:spPr>
+        <p:txBody>
+          <a:bodyPr wrap="square" lIns="0" tIns="0" rIns="0" bIns="0" anchor="t">
             <a:spAutoFit/>
           </a:bodyPr>
           <a:lstStyle/>
@@ -9217,13 +9209,22 @@
               </a:spcAft>
             </a:pPr>
             <a:r>
-              <a:rPr sz="1600" b="0" i="0">
+              <a:rPr sz="3200" b="0" i="0" dirty="0">
                 <a:solidFill>
                   <a:srgbClr val="CDCAC5"/>
                 </a:solidFill>
                 <a:latin typeface="Segoe UI"/>
               </a:rPr>
-              <a:t>Narrow agents that do the work, and a governance layer that makes them accountable.</a:t>
+              <a:t>Narrow agents that do the work, and a governance layer that makes them accountable</a:t>
+            </a:r>
+            <a:r>
+              <a:rPr sz="1600" b="0" i="0" dirty="0">
+                <a:solidFill>
+                  <a:srgbClr val="CDCAC5"/>
+                </a:solidFill>
+                <a:latin typeface="Segoe UI"/>
+              </a:rPr>
+              <a:t>.</a:t>
             </a:r>
           </a:p>
         </p:txBody>
@@ -9245,7 +9246,7 @@
           <a:noFill/>
         </p:spPr>
         <p:txBody>
-          <a:bodyPr wrap="square" lIns="0" rIns="0" tIns="0" bIns="0" anchor="t">
+          <a:bodyPr wrap="square" lIns="0" tIns="0" rIns="0" bIns="0" anchor="t">
             <a:spAutoFit/>
           </a:bodyPr>
           <a:lstStyle/>
@@ -9284,7 +9285,7 @@
           <a:noFill/>
         </p:spPr>
         <p:txBody>
-          <a:bodyPr wrap="square" lIns="0" rIns="0" tIns="0" bIns="0" anchor="t">
+          <a:bodyPr wrap="square" lIns="0" tIns="0" rIns="0" bIns="0" anchor="t">
             <a:spAutoFit/>
           </a:bodyPr>
           <a:lstStyle/>
@@ -9315,7 +9316,7 @@
 </file>
 
 <file path=ppt/slides/slide6.xml><?xml version="1.0" encoding="utf-8"?>
-<p:sld xmlns:a="http://schemas.openxmlformats.org/drawingml/2006/main" xmlns:p="http://schemas.openxmlformats.org/presentationml/2006/main" xmlns:r="http://schemas.openxmlformats.org/officeDocument/2006/relationships">
+<p:sld xmlns:a="http://schemas.openxmlformats.org/drawingml/2006/main" xmlns:r="http://schemas.openxmlformats.org/officeDocument/2006/relationships" xmlns:p="http://schemas.openxmlformats.org/presentationml/2006/main">
   <p:cSld>
     <p:spTree>
       <p:nvGrpSpPr>
@@ -9323,7 +9324,14 @@
         <p:cNvGrpSpPr/>
         <p:nvPr/>
       </p:nvGrpSpPr>
-      <p:grpSpPr/>
+      <p:grpSpPr>
+        <a:xfrm>
+          <a:off x="0" y="0"/>
+          <a:ext cx="0" cy="0"/>
+          <a:chOff x="0" y="0"/>
+          <a:chExt cx="0" cy="0"/>
+        </a:xfrm>
+      </p:grpSpPr>
       <p:sp>
         <p:nvSpPr>
           <p:cNvPr id="2" name="Rectangle 1"/>
@@ -9365,6 +9373,7 @@
           <a:lstStyle/>
           <a:p>
             <a:pPr algn="ctr"/>
+            <a:endParaRPr/>
           </a:p>
         </p:txBody>
       </p:sp>
@@ -9385,7 +9394,7 @@
           <a:noFill/>
         </p:spPr>
         <p:txBody>
-          <a:bodyPr wrap="square" lIns="0" rIns="0" tIns="0" bIns="0" anchor="t">
+          <a:bodyPr wrap="square" lIns="0" tIns="0" rIns="0" bIns="0" anchor="t">
             <a:spAutoFit/>
           </a:bodyPr>
           <a:lstStyle/>
@@ -9424,7 +9433,7 @@
           <a:noFill/>
         </p:spPr>
         <p:txBody>
-          <a:bodyPr wrap="square" lIns="0" rIns="0" tIns="0" bIns="0" anchor="t">
+          <a:bodyPr wrap="square" lIns="0" tIns="0" rIns="0" bIns="0" anchor="t">
             <a:spAutoFit/>
           </a:bodyPr>
           <a:lstStyle/>
@@ -9490,6 +9499,7 @@
           <a:lstStyle/>
           <a:p>
             <a:pPr algn="ctr"/>
+            <a:endParaRPr/>
           </a:p>
         </p:txBody>
       </p:sp>
@@ -9510,7 +9520,7 @@
           <a:noFill/>
         </p:spPr>
         <p:txBody>
-          <a:bodyPr wrap="square" lIns="0" rIns="0" tIns="0" bIns="0" anchor="t">
+          <a:bodyPr wrap="square" lIns="0" tIns="0" rIns="0" bIns="0" anchor="t">
             <a:spAutoFit/>
           </a:bodyPr>
           <a:lstStyle/>
@@ -9549,7 +9559,7 @@
           <a:noFill/>
         </p:spPr>
         <p:txBody>
-          <a:bodyPr wrap="square" lIns="0" rIns="0" tIns="0" bIns="0" anchor="t">
+          <a:bodyPr wrap="square" lIns="0" tIns="0" rIns="0" bIns="0" anchor="t">
             <a:spAutoFit/>
           </a:bodyPr>
           <a:lstStyle/>
@@ -9614,6 +9624,7 @@
           <a:lstStyle/>
           <a:p>
             <a:pPr algn="ctr"/>
+            <a:endParaRPr/>
           </a:p>
         </p:txBody>
       </p:sp>
@@ -9658,6 +9669,7 @@
           <a:lstStyle/>
           <a:p>
             <a:pPr algn="ctr"/>
+            <a:endParaRPr/>
           </a:p>
         </p:txBody>
       </p:sp>
@@ -9678,7 +9690,7 @@
           <a:noFill/>
         </p:spPr>
         <p:txBody>
-          <a:bodyPr wrap="square" lIns="0" rIns="0" tIns="0" bIns="0" anchor="t">
+          <a:bodyPr wrap="square" lIns="0" tIns="0" rIns="0" bIns="0" anchor="t">
             <a:spAutoFit/>
           </a:bodyPr>
           <a:lstStyle/>
@@ -9717,7 +9729,7 @@
           <a:noFill/>
         </p:spPr>
         <p:txBody>
-          <a:bodyPr wrap="square" lIns="0" rIns="0" tIns="0" bIns="0" anchor="t">
+          <a:bodyPr wrap="square" lIns="0" tIns="0" rIns="0" bIns="0" anchor="t">
             <a:spAutoFit/>
           </a:bodyPr>
           <a:lstStyle/>
@@ -9759,7 +9771,7 @@
           <a:noFill/>
         </p:spPr>
         <p:txBody>
-          <a:bodyPr wrap="square" lIns="0" rIns="0" tIns="0" bIns="0" anchor="t">
+          <a:bodyPr wrap="square" lIns="0" tIns="0" rIns="0" bIns="0" anchor="t">
             <a:spAutoFit/>
           </a:bodyPr>
           <a:lstStyle/>
@@ -9824,6 +9836,7 @@
           <a:lstStyle/>
           <a:p>
             <a:pPr algn="ctr"/>
+            <a:endParaRPr/>
           </a:p>
         </p:txBody>
       </p:sp>
@@ -9868,6 +9881,7 @@
           <a:lstStyle/>
           <a:p>
             <a:pPr algn="ctr"/>
+            <a:endParaRPr/>
           </a:p>
         </p:txBody>
       </p:sp>
@@ -9888,7 +9902,7 @@
           <a:noFill/>
         </p:spPr>
         <p:txBody>
-          <a:bodyPr wrap="square" lIns="0" rIns="0" tIns="0" bIns="0" anchor="t">
+          <a:bodyPr wrap="square" lIns="0" tIns="0" rIns="0" bIns="0" anchor="t">
             <a:spAutoFit/>
           </a:bodyPr>
           <a:lstStyle/>
@@ -9927,7 +9941,7 @@
           <a:noFill/>
         </p:spPr>
         <p:txBody>
-          <a:bodyPr wrap="square" lIns="0" rIns="0" tIns="0" bIns="0" anchor="t">
+          <a:bodyPr wrap="square" lIns="0" tIns="0" rIns="0" bIns="0" anchor="t">
             <a:spAutoFit/>
           </a:bodyPr>
           <a:lstStyle/>
@@ -9969,7 +9983,7 @@
           <a:noFill/>
         </p:spPr>
         <p:txBody>
-          <a:bodyPr wrap="square" lIns="0" rIns="0" tIns="0" bIns="0" anchor="t">
+          <a:bodyPr wrap="square" lIns="0" tIns="0" rIns="0" bIns="0" anchor="t">
             <a:spAutoFit/>
           </a:bodyPr>
           <a:lstStyle/>
@@ -10012,7 +10026,7 @@
 </file>
 
 <file path=ppt/slides/slide7.xml><?xml version="1.0" encoding="utf-8"?>
-<p:sld xmlns:a="http://schemas.openxmlformats.org/drawingml/2006/main" xmlns:p="http://schemas.openxmlformats.org/presentationml/2006/main" xmlns:r="http://schemas.openxmlformats.org/officeDocument/2006/relationships">
+<p:sld xmlns:a="http://schemas.openxmlformats.org/drawingml/2006/main" xmlns:r="http://schemas.openxmlformats.org/officeDocument/2006/relationships" xmlns:p="http://schemas.openxmlformats.org/presentationml/2006/main">
   <p:cSld>
     <p:spTree>
       <p:nvGrpSpPr>
@@ -10020,7 +10034,14 @@
         <p:cNvGrpSpPr/>
         <p:nvPr/>
       </p:nvGrpSpPr>
-      <p:grpSpPr/>
+      <p:grpSpPr>
+        <a:xfrm>
+          <a:off x="0" y="0"/>
+          <a:ext cx="0" cy="0"/>
+          <a:chOff x="0" y="0"/>
+          <a:chExt cx="0" cy="0"/>
+        </a:xfrm>
+      </p:grpSpPr>
       <p:sp>
         <p:nvSpPr>
           <p:cNvPr id="2" name="Rectangle 1"/>
@@ -10062,6 +10083,7 @@
           <a:lstStyle/>
           <a:p>
             <a:pPr algn="ctr"/>
+            <a:endParaRPr/>
           </a:p>
         </p:txBody>
       </p:sp>
@@ -10082,7 +10104,7 @@
           <a:noFill/>
         </p:spPr>
         <p:txBody>
-          <a:bodyPr wrap="square" lIns="0" rIns="0" tIns="0" bIns="0" anchor="t">
+          <a:bodyPr wrap="square" lIns="0" tIns="0" rIns="0" bIns="0" anchor="t">
             <a:spAutoFit/>
           </a:bodyPr>
           <a:lstStyle/>
@@ -10121,7 +10143,7 @@
           <a:noFill/>
         </p:spPr>
         <p:txBody>
-          <a:bodyPr wrap="square" lIns="0" rIns="0" tIns="0" bIns="0" anchor="t">
+          <a:bodyPr wrap="square" lIns="0" tIns="0" rIns="0" bIns="0" anchor="t">
             <a:spAutoFit/>
           </a:bodyPr>
           <a:lstStyle/>
@@ -10187,6 +10209,7 @@
           <a:lstStyle/>
           <a:p>
             <a:pPr algn="ctr"/>
+            <a:endParaRPr/>
           </a:p>
         </p:txBody>
       </p:sp>
@@ -10207,7 +10230,7 @@
           <a:noFill/>
         </p:spPr>
         <p:txBody>
-          <a:bodyPr wrap="square" lIns="0" rIns="0" tIns="0" bIns="0" anchor="t">
+          <a:bodyPr wrap="square" lIns="0" tIns="0" rIns="0" bIns="0" anchor="t">
             <a:spAutoFit/>
           </a:bodyPr>
           <a:lstStyle/>
@@ -10246,7 +10269,7 @@
           <a:noFill/>
         </p:spPr>
         <p:txBody>
-          <a:bodyPr wrap="square" lIns="0" rIns="0" tIns="0" bIns="0" anchor="t">
+          <a:bodyPr wrap="square" lIns="0" tIns="0" rIns="0" bIns="0" anchor="t">
             <a:spAutoFit/>
           </a:bodyPr>
           <a:lstStyle/>
@@ -10311,6 +10334,7 @@
           <a:lstStyle/>
           <a:p>
             <a:pPr algn="ctr"/>
+            <a:endParaRPr/>
           </a:p>
         </p:txBody>
       </p:sp>
@@ -10355,6 +10379,7 @@
           <a:lstStyle/>
           <a:p>
             <a:pPr algn="ctr"/>
+            <a:endParaRPr/>
           </a:p>
         </p:txBody>
       </p:sp>
@@ -10375,7 +10400,7 @@
           <a:noFill/>
         </p:spPr>
         <p:txBody>
-          <a:bodyPr wrap="square" lIns="0" rIns="0" tIns="0" bIns="0" anchor="t">
+          <a:bodyPr wrap="square" lIns="0" tIns="0" rIns="0" bIns="0" anchor="t">
             <a:spAutoFit/>
           </a:bodyPr>
           <a:lstStyle/>
@@ -10414,7 +10439,7 @@
           <a:noFill/>
         </p:spPr>
         <p:txBody>
-          <a:bodyPr wrap="square" lIns="0" rIns="0" tIns="0" bIns="0" anchor="t">
+          <a:bodyPr wrap="square" lIns="0" tIns="0" rIns="0" bIns="0" anchor="t">
             <a:spAutoFit/>
           </a:bodyPr>
           <a:lstStyle/>
@@ -10479,6 +10504,7 @@
           <a:lstStyle/>
           <a:p>
             <a:pPr algn="ctr"/>
+            <a:endParaRPr/>
           </a:p>
         </p:txBody>
       </p:sp>
@@ -10523,6 +10549,7 @@
           <a:lstStyle/>
           <a:p>
             <a:pPr algn="ctr"/>
+            <a:endParaRPr/>
           </a:p>
         </p:txBody>
       </p:sp>
@@ -10543,7 +10570,7 @@
           <a:noFill/>
         </p:spPr>
         <p:txBody>
-          <a:bodyPr wrap="square" lIns="0" rIns="0" tIns="0" bIns="0" anchor="t">
+          <a:bodyPr wrap="square" lIns="0" tIns="0" rIns="0" bIns="0" anchor="t">
             <a:spAutoFit/>
           </a:bodyPr>
           <a:lstStyle/>
@@ -10582,7 +10609,7 @@
           <a:noFill/>
         </p:spPr>
         <p:txBody>
-          <a:bodyPr wrap="square" lIns="0" rIns="0" tIns="0" bIns="0" anchor="t">
+          <a:bodyPr wrap="square" lIns="0" tIns="0" rIns="0" bIns="0" anchor="t">
             <a:spAutoFit/>
           </a:bodyPr>
           <a:lstStyle/>
@@ -10647,6 +10674,7 @@
           <a:lstStyle/>
           <a:p>
             <a:pPr algn="ctr"/>
+            <a:endParaRPr/>
           </a:p>
         </p:txBody>
       </p:sp>
@@ -10691,6 +10719,7 @@
           <a:lstStyle/>
           <a:p>
             <a:pPr algn="ctr"/>
+            <a:endParaRPr/>
           </a:p>
         </p:txBody>
       </p:sp>
@@ -10711,7 +10740,7 @@
           <a:noFill/>
         </p:spPr>
         <p:txBody>
-          <a:bodyPr wrap="square" lIns="0" rIns="0" tIns="0" bIns="0" anchor="t">
+          <a:bodyPr wrap="square" lIns="0" tIns="0" rIns="0" bIns="0" anchor="t">
             <a:spAutoFit/>
           </a:bodyPr>
           <a:lstStyle/>
@@ -10750,7 +10779,7 @@
           <a:noFill/>
         </p:spPr>
         <p:txBody>
-          <a:bodyPr wrap="square" lIns="0" rIns="0" tIns="0" bIns="0" anchor="t">
+          <a:bodyPr wrap="square" lIns="0" tIns="0" rIns="0" bIns="0" anchor="t">
             <a:spAutoFit/>
           </a:bodyPr>
           <a:lstStyle/>
@@ -10815,6 +10844,7 @@
           <a:lstStyle/>
           <a:p>
             <a:pPr algn="ctr"/>
+            <a:endParaRPr/>
           </a:p>
         </p:txBody>
       </p:sp>
@@ -10859,6 +10889,7 @@
           <a:lstStyle/>
           <a:p>
             <a:pPr algn="ctr"/>
+            <a:endParaRPr/>
           </a:p>
         </p:txBody>
       </p:sp>
@@ -10879,7 +10910,7 @@
           <a:noFill/>
         </p:spPr>
         <p:txBody>
-          <a:bodyPr wrap="square" lIns="0" rIns="0" tIns="0" bIns="0" anchor="t">
+          <a:bodyPr wrap="square" lIns="0" tIns="0" rIns="0" bIns="0" anchor="t">
             <a:spAutoFit/>
           </a:bodyPr>
           <a:lstStyle/>
@@ -10918,7 +10949,7 @@
           <a:noFill/>
         </p:spPr>
         <p:txBody>
-          <a:bodyPr wrap="square" lIns="0" rIns="0" tIns="0" bIns="0" anchor="t">
+          <a:bodyPr wrap="square" lIns="0" tIns="0" rIns="0" bIns="0" anchor="t">
             <a:spAutoFit/>
           </a:bodyPr>
           <a:lstStyle/>
@@ -10983,6 +11014,7 @@
           <a:lstStyle/>
           <a:p>
             <a:pPr algn="ctr"/>
+            <a:endParaRPr/>
           </a:p>
         </p:txBody>
       </p:sp>
@@ -11027,6 +11059,7 @@
           <a:lstStyle/>
           <a:p>
             <a:pPr algn="ctr"/>
+            <a:endParaRPr/>
           </a:p>
         </p:txBody>
       </p:sp>
@@ -11047,7 +11080,7 @@
           <a:noFill/>
         </p:spPr>
         <p:txBody>
-          <a:bodyPr wrap="square" lIns="0" rIns="0" tIns="0" bIns="0" anchor="t">
+          <a:bodyPr wrap="square" lIns="0" tIns="0" rIns="0" bIns="0" anchor="t">
             <a:spAutoFit/>
           </a:bodyPr>
           <a:lstStyle/>
@@ -11086,7 +11119,7 @@
           <a:noFill/>
         </p:spPr>
         <p:txBody>
-          <a:bodyPr wrap="square" lIns="0" rIns="0" tIns="0" bIns="0" anchor="t">
+          <a:bodyPr wrap="square" lIns="0" tIns="0" rIns="0" bIns="0" anchor="t">
             <a:spAutoFit/>
           </a:bodyPr>
           <a:lstStyle/>
@@ -11151,6 +11184,7 @@
           <a:lstStyle/>
           <a:p>
             <a:pPr algn="ctr"/>
+            <a:endParaRPr/>
           </a:p>
         </p:txBody>
       </p:sp>
@@ -11195,6 +11229,7 @@
           <a:lstStyle/>
           <a:p>
             <a:pPr algn="ctr"/>
+            <a:endParaRPr/>
           </a:p>
         </p:txBody>
       </p:sp>
@@ -11215,7 +11250,7 @@
           <a:noFill/>
         </p:spPr>
         <p:txBody>
-          <a:bodyPr wrap="square" lIns="0" rIns="0" tIns="0" bIns="0" anchor="t">
+          <a:bodyPr wrap="square" lIns="0" tIns="0" rIns="0" bIns="0" anchor="t">
             <a:spAutoFit/>
           </a:bodyPr>
           <a:lstStyle/>
@@ -11254,7 +11289,7 @@
           <a:noFill/>
         </p:spPr>
         <p:txBody>
-          <a:bodyPr wrap="square" lIns="0" rIns="0" tIns="0" bIns="0" anchor="t">
+          <a:bodyPr wrap="square" lIns="0" tIns="0" rIns="0" bIns="0" anchor="t">
             <a:spAutoFit/>
           </a:bodyPr>
           <a:lstStyle/>
@@ -11319,6 +11354,7 @@
           <a:lstStyle/>
           <a:p>
             <a:pPr algn="ctr"/>
+            <a:endParaRPr/>
           </a:p>
         </p:txBody>
       </p:sp>
@@ -11363,6 +11399,7 @@
           <a:lstStyle/>
           <a:p>
             <a:pPr algn="ctr"/>
+            <a:endParaRPr/>
           </a:p>
         </p:txBody>
       </p:sp>
@@ -11383,7 +11420,7 @@
           <a:noFill/>
         </p:spPr>
         <p:txBody>
-          <a:bodyPr wrap="square" lIns="0" rIns="0" tIns="0" bIns="0" anchor="t">
+          <a:bodyPr wrap="square" lIns="0" tIns="0" rIns="0" bIns="0" anchor="t">
             <a:spAutoFit/>
           </a:bodyPr>
           <a:lstStyle/>
@@ -11422,7 +11459,7 @@
           <a:noFill/>
         </p:spPr>
         <p:txBody>
-          <a:bodyPr wrap="square" lIns="0" rIns="0" tIns="0" bIns="0" anchor="t">
+          <a:bodyPr wrap="square" lIns="0" tIns="0" rIns="0" bIns="0" anchor="t">
             <a:spAutoFit/>
           </a:bodyPr>
           <a:lstStyle/>
@@ -11487,6 +11524,7 @@
           <a:lstStyle/>
           <a:p>
             <a:pPr algn="ctr"/>
+            <a:endParaRPr/>
           </a:p>
         </p:txBody>
       </p:sp>
@@ -11531,6 +11569,7 @@
           <a:lstStyle/>
           <a:p>
             <a:pPr algn="ctr"/>
+            <a:endParaRPr/>
           </a:p>
         </p:txBody>
       </p:sp>
@@ -11551,7 +11590,7 @@
           <a:noFill/>
         </p:spPr>
         <p:txBody>
-          <a:bodyPr wrap="square" lIns="0" rIns="0" tIns="0" bIns="0" anchor="t">
+          <a:bodyPr wrap="square" lIns="0" tIns="0" rIns="0" bIns="0" anchor="t">
             <a:spAutoFit/>
           </a:bodyPr>
           <a:lstStyle/>
@@ -11590,7 +11629,7 @@
           <a:noFill/>
         </p:spPr>
         <p:txBody>
-          <a:bodyPr wrap="square" lIns="0" rIns="0" tIns="0" bIns="0" anchor="t">
+          <a:bodyPr wrap="square" lIns="0" tIns="0" rIns="0" bIns="0" anchor="t">
             <a:spAutoFit/>
           </a:bodyPr>
           <a:lstStyle/>
@@ -11655,6 +11694,7 @@
           <a:lstStyle/>
           <a:p>
             <a:pPr algn="ctr"/>
+            <a:endParaRPr/>
           </a:p>
         </p:txBody>
       </p:sp>
@@ -11699,6 +11739,7 @@
           <a:lstStyle/>
           <a:p>
             <a:pPr algn="ctr"/>
+            <a:endParaRPr/>
           </a:p>
         </p:txBody>
       </p:sp>
@@ -11719,7 +11760,7 @@
           <a:noFill/>
         </p:spPr>
         <p:txBody>
-          <a:bodyPr wrap="square" lIns="0" rIns="0" tIns="0" bIns="0" anchor="t">
+          <a:bodyPr wrap="square" lIns="0" tIns="0" rIns="0" bIns="0" anchor="t">
             <a:spAutoFit/>
           </a:bodyPr>
           <a:lstStyle/>
@@ -11758,7 +11799,7 @@
           <a:noFill/>
         </p:spPr>
         <p:txBody>
-          <a:bodyPr wrap="square" lIns="0" rIns="0" tIns="0" bIns="0" anchor="t">
+          <a:bodyPr wrap="square" lIns="0" tIns="0" rIns="0" bIns="0" anchor="t">
             <a:spAutoFit/>
           </a:bodyPr>
           <a:lstStyle/>
@@ -11823,6 +11864,7 @@
           <a:lstStyle/>
           <a:p>
             <a:pPr algn="ctr"/>
+            <a:endParaRPr/>
           </a:p>
         </p:txBody>
       </p:sp>
@@ -11867,6 +11909,7 @@
           <a:lstStyle/>
           <a:p>
             <a:pPr algn="ctr"/>
+            <a:endParaRPr/>
           </a:p>
         </p:txBody>
       </p:sp>
@@ -11887,7 +11930,7 @@
           <a:noFill/>
         </p:spPr>
         <p:txBody>
-          <a:bodyPr wrap="square" lIns="0" rIns="0" tIns="0" bIns="0" anchor="t">
+          <a:bodyPr wrap="square" lIns="0" tIns="0" rIns="0" bIns="0" anchor="t">
             <a:spAutoFit/>
           </a:bodyPr>
           <a:lstStyle/>
@@ -11926,7 +11969,7 @@
           <a:noFill/>
         </p:spPr>
         <p:txBody>
-          <a:bodyPr wrap="square" lIns="0" rIns="0" tIns="0" bIns="0" anchor="t">
+          <a:bodyPr wrap="square" lIns="0" tIns="0" rIns="0" bIns="0" anchor="t">
             <a:spAutoFit/>
           </a:bodyPr>
           <a:lstStyle/>
@@ -11991,6 +12034,7 @@
           <a:lstStyle/>
           <a:p>
             <a:pPr algn="ctr"/>
+            <a:endParaRPr/>
           </a:p>
         </p:txBody>
       </p:sp>
@@ -12035,6 +12079,7 @@
           <a:lstStyle/>
           <a:p>
             <a:pPr algn="ctr"/>
+            <a:endParaRPr/>
           </a:p>
         </p:txBody>
       </p:sp>
@@ -12055,7 +12100,7 @@
           <a:noFill/>
         </p:spPr>
         <p:txBody>
-          <a:bodyPr wrap="square" lIns="0" rIns="0" tIns="0" bIns="0" anchor="t">
+          <a:bodyPr wrap="square" lIns="0" tIns="0" rIns="0" bIns="0" anchor="t">
             <a:spAutoFit/>
           </a:bodyPr>
           <a:lstStyle/>
@@ -12094,7 +12139,7 @@
           <a:noFill/>
         </p:spPr>
         <p:txBody>
-          <a:bodyPr wrap="square" lIns="0" rIns="0" tIns="0" bIns="0" anchor="t">
+          <a:bodyPr wrap="square" lIns="0" tIns="0" rIns="0" bIns="0" anchor="t">
             <a:spAutoFit/>
           </a:bodyPr>
           <a:lstStyle/>
@@ -12159,6 +12204,7 @@
           <a:lstStyle/>
           <a:p>
             <a:pPr algn="ctr"/>
+            <a:endParaRPr/>
           </a:p>
         </p:txBody>
       </p:sp>
@@ -12203,6 +12249,7 @@
           <a:lstStyle/>
           <a:p>
             <a:pPr algn="ctr"/>
+            <a:endParaRPr/>
           </a:p>
         </p:txBody>
       </p:sp>
@@ -12223,7 +12270,7 @@
           <a:noFill/>
         </p:spPr>
         <p:txBody>
-          <a:bodyPr wrap="square" lIns="0" rIns="0" tIns="0" bIns="0" anchor="t">
+          <a:bodyPr wrap="square" lIns="0" tIns="0" rIns="0" bIns="0" anchor="t">
             <a:spAutoFit/>
           </a:bodyPr>
           <a:lstStyle/>
@@ -12262,7 +12309,7 @@
           <a:noFill/>
         </p:spPr>
         <p:txBody>
-          <a:bodyPr wrap="square" lIns="0" rIns="0" tIns="0" bIns="0" anchor="t">
+          <a:bodyPr wrap="square" lIns="0" tIns="0" rIns="0" bIns="0" anchor="t">
             <a:spAutoFit/>
           </a:bodyPr>
           <a:lstStyle/>
@@ -12301,7 +12348,7 @@
           <a:noFill/>
         </p:spPr>
         <p:txBody>
-          <a:bodyPr wrap="square" lIns="0" rIns="0" tIns="0" bIns="0" anchor="t">
+          <a:bodyPr wrap="square" lIns="0" tIns="0" rIns="0" bIns="0" anchor="t">
             <a:spAutoFit/>
           </a:bodyPr>
           <a:lstStyle/>
@@ -12344,7 +12391,7 @@
 </file>
 
 <file path=ppt/slides/slide8.xml><?xml version="1.0" encoding="utf-8"?>
-<p:sld xmlns:a="http://schemas.openxmlformats.org/drawingml/2006/main" xmlns:p="http://schemas.openxmlformats.org/presentationml/2006/main" xmlns:r="http://schemas.openxmlformats.org/officeDocument/2006/relationships">
+<p:sld xmlns:a="http://schemas.openxmlformats.org/drawingml/2006/main" xmlns:r="http://schemas.openxmlformats.org/officeDocument/2006/relationships" xmlns:p="http://schemas.openxmlformats.org/presentationml/2006/main">
   <p:cSld>
     <p:spTree>
       <p:nvGrpSpPr>
@@ -12352,7 +12399,14 @@
         <p:cNvGrpSpPr/>
         <p:nvPr/>
       </p:nvGrpSpPr>
-      <p:grpSpPr/>
+      <p:grpSpPr>
+        <a:xfrm>
+          <a:off x="0" y="0"/>
+          <a:ext cx="0" cy="0"/>
+          <a:chOff x="0" y="0"/>
+          <a:chExt cx="0" cy="0"/>
+        </a:xfrm>
+      </p:grpSpPr>
       <p:sp>
         <p:nvSpPr>
           <p:cNvPr id="2" name="Rectangle 1"/>
@@ -12394,6 +12448,7 @@
           <a:lstStyle/>
           <a:p>
             <a:pPr algn="ctr"/>
+            <a:endParaRPr/>
           </a:p>
         </p:txBody>
       </p:sp>
@@ -12414,7 +12469,7 @@
           <a:noFill/>
         </p:spPr>
         <p:txBody>
-          <a:bodyPr wrap="square" lIns="0" rIns="0" tIns="0" bIns="0" anchor="t">
+          <a:bodyPr wrap="square" lIns="0" tIns="0" rIns="0" bIns="0" anchor="t">
             <a:spAutoFit/>
           </a:bodyPr>
           <a:lstStyle/>
@@ -12453,7 +12508,7 @@
           <a:noFill/>
         </p:spPr>
         <p:txBody>
-          <a:bodyPr wrap="square" lIns="0" rIns="0" tIns="0" bIns="0" anchor="t">
+          <a:bodyPr wrap="square" lIns="0" tIns="0" rIns="0" bIns="0" anchor="t">
             <a:spAutoFit/>
           </a:bodyPr>
           <a:lstStyle/>
@@ -12519,6 +12574,7 @@
           <a:lstStyle/>
           <a:p>
             <a:pPr algn="ctr"/>
+            <a:endParaRPr/>
           </a:p>
         </p:txBody>
       </p:sp>
@@ -12539,7 +12595,7 @@
           <a:noFill/>
         </p:spPr>
         <p:txBody>
-          <a:bodyPr wrap="square" lIns="0" rIns="0" tIns="0" bIns="0" anchor="t">
+          <a:bodyPr wrap="square" lIns="0" tIns="0" rIns="0" bIns="0" anchor="t">
             <a:spAutoFit/>
           </a:bodyPr>
           <a:lstStyle/>
@@ -12578,7 +12634,7 @@
           <a:noFill/>
         </p:spPr>
         <p:txBody>
-          <a:bodyPr wrap="square" lIns="0" rIns="0" tIns="0" bIns="0" anchor="t">
+          <a:bodyPr wrap="square" lIns="0" tIns="0" rIns="0" bIns="0" anchor="t">
             <a:spAutoFit/>
           </a:bodyPr>
           <a:lstStyle/>
@@ -12641,6 +12697,7 @@
           <a:lstStyle/>
           <a:p>
             <a:pPr algn="ctr"/>
+            <a:endParaRPr/>
           </a:p>
         </p:txBody>
       </p:sp>
@@ -12685,6 +12742,7 @@
           <a:lstStyle/>
           <a:p>
             <a:pPr algn="ctr"/>
+            <a:endParaRPr/>
           </a:p>
         </p:txBody>
       </p:sp>
@@ -12729,6 +12787,7 @@
           <a:lstStyle/>
           <a:p>
             <a:pPr algn="ctr"/>
+            <a:endParaRPr/>
           </a:p>
         </p:txBody>
       </p:sp>
@@ -12749,7 +12808,7 @@
           <a:noFill/>
         </p:spPr>
         <p:txBody>
-          <a:bodyPr wrap="square" lIns="0" rIns="0" tIns="0" bIns="0" anchor="t">
+          <a:bodyPr wrap="square" lIns="0" tIns="0" rIns="0" bIns="0" anchor="t">
             <a:spAutoFit/>
           </a:bodyPr>
           <a:lstStyle/>
@@ -12759,15 +12818,7 @@
                 <a:spcPts val="0"/>
               </a:spcAft>
             </a:pPr>
-            <a:r>
-              <a:rPr sz="900" b="1" i="0">
-                <a:solidFill>
-                  <a:srgbClr val="706B64"/>
-                </a:solidFill>
-                <a:latin typeface="Segoe UI"/>
-              </a:rPr>
-              <a:t/>
-            </a:r>
+            <a:endParaRPr/>
           </a:p>
         </p:txBody>
       </p:sp>
@@ -12788,7 +12839,7 @@
           <a:noFill/>
         </p:spPr>
         <p:txBody>
-          <a:bodyPr wrap="square" lIns="0" rIns="0" tIns="0" bIns="0" anchor="t">
+          <a:bodyPr wrap="square" lIns="0" tIns="0" rIns="0" bIns="0" anchor="t">
             <a:spAutoFit/>
           </a:bodyPr>
           <a:lstStyle/>
@@ -12827,7 +12878,7 @@
           <a:noFill/>
         </p:spPr>
         <p:txBody>
-          <a:bodyPr wrap="square" lIns="0" rIns="0" tIns="0" bIns="0" anchor="t">
+          <a:bodyPr wrap="square" lIns="0" tIns="0" rIns="0" bIns="0" anchor="t">
             <a:spAutoFit/>
           </a:bodyPr>
           <a:lstStyle/>
@@ -12866,7 +12917,7 @@
           <a:noFill/>
         </p:spPr>
         <p:txBody>
-          <a:bodyPr wrap="square" lIns="0" rIns="0" tIns="0" bIns="0" anchor="t">
+          <a:bodyPr wrap="square" lIns="0" tIns="0" rIns="0" bIns="0" anchor="t">
             <a:spAutoFit/>
           </a:bodyPr>
           <a:lstStyle/>
@@ -12908,7 +12959,7 @@
           <a:noFill/>
         </p:spPr>
         <p:txBody>
-          <a:bodyPr wrap="square" lIns="0" rIns="0" tIns="0" bIns="0" anchor="t">
+          <a:bodyPr wrap="square" lIns="0" tIns="0" rIns="0" bIns="0" anchor="t">
             <a:spAutoFit/>
           </a:bodyPr>
           <a:lstStyle/>
@@ -12950,7 +13001,7 @@
           <a:noFill/>
         </p:spPr>
         <p:txBody>
-          <a:bodyPr wrap="square" lIns="0" rIns="0" tIns="0" bIns="0" anchor="t">
+          <a:bodyPr wrap="square" lIns="0" tIns="0" rIns="0" bIns="0" anchor="t">
             <a:spAutoFit/>
           </a:bodyPr>
           <a:lstStyle/>
@@ -13016,6 +13067,7 @@
           <a:lstStyle/>
           <a:p>
             <a:pPr algn="ctr"/>
+            <a:endParaRPr/>
           </a:p>
         </p:txBody>
       </p:sp>
@@ -13036,7 +13088,7 @@
           <a:noFill/>
         </p:spPr>
         <p:txBody>
-          <a:bodyPr wrap="square" lIns="0" rIns="0" tIns="0" bIns="0" anchor="t">
+          <a:bodyPr wrap="square" lIns="0" tIns="0" rIns="0" bIns="0" anchor="t">
             <a:spAutoFit/>
           </a:bodyPr>
           <a:lstStyle/>
@@ -13078,7 +13130,7 @@
           <a:noFill/>
         </p:spPr>
         <p:txBody>
-          <a:bodyPr wrap="square" lIns="0" rIns="0" tIns="0" bIns="0" anchor="t">
+          <a:bodyPr wrap="square" lIns="0" tIns="0" rIns="0" bIns="0" anchor="t">
             <a:spAutoFit/>
           </a:bodyPr>
           <a:lstStyle/>
@@ -13120,7 +13172,7 @@
           <a:noFill/>
         </p:spPr>
         <p:txBody>
-          <a:bodyPr wrap="square" lIns="0" rIns="0" tIns="0" bIns="0" anchor="t">
+          <a:bodyPr wrap="square" lIns="0" tIns="0" rIns="0" bIns="0" anchor="t">
             <a:spAutoFit/>
           </a:bodyPr>
           <a:lstStyle/>
@@ -13186,6 +13238,7 @@
           <a:lstStyle/>
           <a:p>
             <a:pPr algn="ctr"/>
+            <a:endParaRPr/>
           </a:p>
         </p:txBody>
       </p:sp>
@@ -13206,7 +13259,7 @@
           <a:noFill/>
         </p:spPr>
         <p:txBody>
-          <a:bodyPr wrap="square" lIns="0" rIns="0" tIns="0" bIns="0" anchor="t">
+          <a:bodyPr wrap="square" lIns="0" tIns="0" rIns="0" bIns="0" anchor="t">
             <a:spAutoFit/>
           </a:bodyPr>
           <a:lstStyle/>
@@ -13248,7 +13301,7 @@
           <a:noFill/>
         </p:spPr>
         <p:txBody>
-          <a:bodyPr wrap="square" lIns="0" rIns="0" tIns="0" bIns="0" anchor="t">
+          <a:bodyPr wrap="square" lIns="0" tIns="0" rIns="0" bIns="0" anchor="t">
             <a:spAutoFit/>
           </a:bodyPr>
           <a:lstStyle/>
@@ -13290,7 +13343,7 @@
           <a:noFill/>
         </p:spPr>
         <p:txBody>
-          <a:bodyPr wrap="square" lIns="0" rIns="0" tIns="0" bIns="0" anchor="t">
+          <a:bodyPr wrap="square" lIns="0" tIns="0" rIns="0" bIns="0" anchor="t">
             <a:spAutoFit/>
           </a:bodyPr>
           <a:lstStyle/>
@@ -13356,6 +13409,7 @@
           <a:lstStyle/>
           <a:p>
             <a:pPr algn="ctr"/>
+            <a:endParaRPr/>
           </a:p>
         </p:txBody>
       </p:sp>
@@ -13402,6 +13456,7 @@
           <a:lstStyle/>
           <a:p>
             <a:pPr algn="ctr"/>
+            <a:endParaRPr/>
           </a:p>
         </p:txBody>
       </p:sp>
@@ -13422,7 +13477,7 @@
           <a:noFill/>
         </p:spPr>
         <p:txBody>
-          <a:bodyPr wrap="square" lIns="0" rIns="0" tIns="0" bIns="0" anchor="t">
+          <a:bodyPr wrap="square" lIns="0" tIns="0" rIns="0" bIns="0" anchor="t">
             <a:spAutoFit/>
           </a:bodyPr>
           <a:lstStyle/>
@@ -13473,7 +13528,7 @@
           <a:noFill/>
         </p:spPr>
         <p:txBody>
-          <a:bodyPr wrap="square" lIns="0" rIns="0" tIns="0" bIns="0" anchor="t">
+          <a:bodyPr wrap="square" lIns="0" tIns="0" rIns="0" bIns="0" anchor="t">
             <a:spAutoFit/>
           </a:bodyPr>
           <a:lstStyle/>
@@ -13515,7 +13570,7 @@
           <a:noFill/>
         </p:spPr>
         <p:txBody>
-          <a:bodyPr wrap="square" lIns="0" rIns="0" tIns="0" bIns="0" anchor="t">
+          <a:bodyPr wrap="square" lIns="0" tIns="0" rIns="0" bIns="0" anchor="t">
             <a:spAutoFit/>
           </a:bodyPr>
           <a:lstStyle/>
@@ -13549,7 +13604,7 @@
 </file>
 
 <file path=ppt/slides/slide9.xml><?xml version="1.0" encoding="utf-8"?>
-<p:sld xmlns:a="http://schemas.openxmlformats.org/drawingml/2006/main" xmlns:p="http://schemas.openxmlformats.org/presentationml/2006/main" xmlns:r="http://schemas.openxmlformats.org/officeDocument/2006/relationships">
+<p:sld xmlns:a="http://schemas.openxmlformats.org/drawingml/2006/main" xmlns:r="http://schemas.openxmlformats.org/officeDocument/2006/relationships" xmlns:p="http://schemas.openxmlformats.org/presentationml/2006/main">
   <p:cSld>
     <p:spTree>
       <p:nvGrpSpPr>
@@ -13557,7 +13612,14 @@
         <p:cNvGrpSpPr/>
         <p:nvPr/>
       </p:nvGrpSpPr>
-      <p:grpSpPr/>
+      <p:grpSpPr>
+        <a:xfrm>
+          <a:off x="0" y="0"/>
+          <a:ext cx="0" cy="0"/>
+          <a:chOff x="0" y="0"/>
+          <a:chExt cx="0" cy="0"/>
+        </a:xfrm>
+      </p:grpSpPr>
       <p:sp>
         <p:nvSpPr>
           <p:cNvPr id="2" name="Rectangle 1"/>
@@ -13599,6 +13661,7 @@
           <a:lstStyle/>
           <a:p>
             <a:pPr algn="ctr"/>
+            <a:endParaRPr/>
           </a:p>
         </p:txBody>
       </p:sp>
@@ -13643,6 +13706,7 @@
           <a:lstStyle/>
           <a:p>
             <a:pPr algn="ctr"/>
+            <a:endParaRPr/>
           </a:p>
         </p:txBody>
       </p:sp>
@@ -13663,7 +13727,7 @@
           <a:noFill/>
         </p:spPr>
         <p:txBody>
-          <a:bodyPr wrap="square" lIns="0" rIns="0" tIns="0" bIns="0" anchor="t">
+          <a:bodyPr wrap="square" lIns="0" tIns="0" rIns="0" bIns="0" anchor="t">
             <a:spAutoFit/>
           </a:bodyPr>
           <a:lstStyle/>
@@ -13702,7 +13766,7 @@
           <a:noFill/>
         </p:spPr>
         <p:txBody>
-          <a:bodyPr wrap="square" lIns="0" rIns="0" tIns="0" bIns="0" anchor="t">
+          <a:bodyPr wrap="square" lIns="0" tIns="0" rIns="0" bIns="0" anchor="t">
             <a:spAutoFit/>
           </a:bodyPr>
           <a:lstStyle/>
@@ -13735,16 +13799,16 @@
         </p:nvSpPr>
         <p:spPr>
           <a:xfrm>
-            <a:off x="914400" y="3465576"/>
-            <a:ext cx="8778240" cy="731520"/>
-          </a:xfrm>
-          <a:prstGeom prst="rect">
-            <a:avLst/>
-          </a:prstGeom>
-          <a:noFill/>
-        </p:spPr>
-        <p:txBody>
-          <a:bodyPr wrap="square" lIns="0" rIns="0" tIns="0" bIns="0" anchor="t">
+            <a:off x="985652" y="3614730"/>
+            <a:ext cx="8778240" cy="591509"/>
+          </a:xfrm>
+          <a:prstGeom prst="rect">
+            <a:avLst/>
+          </a:prstGeom>
+          <a:noFill/>
+        </p:spPr>
+        <p:txBody>
+          <a:bodyPr wrap="square" lIns="0" tIns="0" rIns="0" bIns="0" anchor="t">
             <a:spAutoFit/>
           </a:bodyPr>
           <a:lstStyle/>
@@ -13758,13 +13822,40 @@
               </a:spcAft>
             </a:pPr>
             <a:r>
-              <a:rPr sz="1600" b="0" i="0">
+              <a:rPr sz="3200" b="0" i="0" dirty="0">
                 <a:solidFill>
                   <a:srgbClr val="CDCAC5"/>
                 </a:solidFill>
                 <a:latin typeface="Segoe UI"/>
               </a:rPr>
-              <a:t>What is built, what is not, and exactly what the next eighteen months buy.</a:t>
+              <a:t>What is built </a:t>
+            </a:r>
+            <a:r>
+              <a:rPr lang="en-US" sz="3200" b="0" i="0" dirty="0">
+                <a:solidFill>
+                  <a:srgbClr val="CDCAC5"/>
+                </a:solidFill>
+                <a:latin typeface="Segoe UI"/>
+              </a:rPr>
+              <a:t>in </a:t>
+            </a:r>
+            <a:r>
+              <a:rPr sz="3200" b="0" i="0" dirty="0">
+                <a:solidFill>
+                  <a:srgbClr val="CDCAC5"/>
+                </a:solidFill>
+                <a:latin typeface="Segoe UI"/>
+              </a:rPr>
+              <a:t>the next eighteen months</a:t>
+            </a:r>
+            <a:r>
+              <a:rPr sz="1600" b="0" i="0" dirty="0">
+                <a:solidFill>
+                  <a:srgbClr val="CDCAC5"/>
+                </a:solidFill>
+                <a:latin typeface="Segoe UI"/>
+              </a:rPr>
+              <a:t>.</a:t>
             </a:r>
           </a:p>
         </p:txBody>
@@ -13786,7 +13877,7 @@
           <a:noFill/>
         </p:spPr>
         <p:txBody>
-          <a:bodyPr wrap="square" lIns="0" rIns="0" tIns="0" bIns="0" anchor="t">
+          <a:bodyPr wrap="square" lIns="0" tIns="0" rIns="0" bIns="0" anchor="t">
             <a:spAutoFit/>
           </a:bodyPr>
           <a:lstStyle/>
@@ -13825,7 +13916,7 @@
           <a:noFill/>
         </p:spPr>
         <p:txBody>
-          <a:bodyPr wrap="square" lIns="0" rIns="0" tIns="0" bIns="0" anchor="t">
+          <a:bodyPr wrap="square" lIns="0" tIns="0" rIns="0" bIns="0" anchor="t">
             <a:spAutoFit/>
           </a:bodyPr>
           <a:lstStyle/>
@@ -14186,44 +14277,44 @@
         <a:sysClr val="window" lastClr="FFFFFF"/>
       </a:lt1>
       <a:dk2>
-        <a:srgbClr val="1F497D"/>
+        <a:srgbClr val="0E2841"/>
       </a:dk2>
       <a:lt2>
-        <a:srgbClr val="EEECE1"/>
+        <a:srgbClr val="E8E8E8"/>
       </a:lt2>
       <a:accent1>
-        <a:srgbClr val="4F81BD"/>
+        <a:srgbClr val="156082"/>
       </a:accent1>
       <a:accent2>
-        <a:srgbClr val="C0504D"/>
+        <a:srgbClr val="E97132"/>
       </a:accent2>
       <a:accent3>
-        <a:srgbClr val="9BBB59"/>
+        <a:srgbClr val="196B24"/>
       </a:accent3>
       <a:accent4>
-        <a:srgbClr val="8064A2"/>
+        <a:srgbClr val="0F9ED5"/>
       </a:accent4>
       <a:accent5>
-        <a:srgbClr val="4BACC6"/>
+        <a:srgbClr val="A02B93"/>
       </a:accent5>
       <a:accent6>
-        <a:srgbClr val="F79646"/>
+        <a:srgbClr val="4EA72E"/>
       </a:accent6>
       <a:hlink>
-        <a:srgbClr val="0000FF"/>
+        <a:srgbClr val="467886"/>
       </a:hlink>
       <a:folHlink>
-        <a:srgbClr val="800080"/>
+        <a:srgbClr val="96607D"/>
       </a:folHlink>
     </a:clrScheme>
     <a:fontScheme name="Office">
       <a:majorFont>
-        <a:latin typeface="Calibri"/>
+        <a:latin typeface="Aptos Display" panose="02110004020202020204"/>
         <a:ea typeface=""/>
         <a:cs typeface=""/>
-        <a:font script="Jpan" typeface="ＭＳ Ｐゴシック"/>
+        <a:font script="Jpan" typeface="游ゴシック Light"/>
         <a:font script="Hang" typeface="맑은 고딕"/>
-        <a:font script="Hans" typeface="宋体"/>
+        <a:font script="Hans" typeface="等线 Light"/>
         <a:font script="Hant" typeface="新細明體"/>
         <a:font script="Arab" typeface="Times New Roman"/>
         <a:font script="Hebr" typeface="Times New Roman"/>
@@ -14251,14 +14342,31 @@
         <a:font script="Viet" typeface="Times New Roman"/>
         <a:font script="Uigh" typeface="Microsoft Uighur"/>
         <a:font script="Geor" typeface="Sylfaen"/>
+        <a:font script="Armn" typeface="Arial"/>
+        <a:font script="Bugi" typeface="Leelawadee UI"/>
+        <a:font script="Bopo" typeface="Microsoft JhengHei"/>
+        <a:font script="Java" typeface="Javanese Text"/>
+        <a:font script="Lisu" typeface="Segoe UI"/>
+        <a:font script="Mymr" typeface="Myanmar Text"/>
+        <a:font script="Nkoo" typeface="Ebrima"/>
+        <a:font script="Olck" typeface="Nirmala UI"/>
+        <a:font script="Osma" typeface="Ebrima"/>
+        <a:font script="Phag" typeface="Phagspa"/>
+        <a:font script="Syrn" typeface="Estrangelo Edessa"/>
+        <a:font script="Syrj" typeface="Estrangelo Edessa"/>
+        <a:font script="Syre" typeface="Estrangelo Edessa"/>
+        <a:font script="Sora" typeface="Nirmala UI"/>
+        <a:font script="Tale" typeface="Microsoft Tai Le"/>
+        <a:font script="Talu" typeface="Microsoft New Tai Lue"/>
+        <a:font script="Tfng" typeface="Ebrima"/>
       </a:majorFont>
       <a:minorFont>
-        <a:latin typeface="Calibri"/>
+        <a:latin typeface="Aptos" panose="02110004020202020204"/>
         <a:ea typeface=""/>
         <a:cs typeface=""/>
-        <a:font script="Jpan" typeface="ＭＳ Ｐゴシック"/>
+        <a:font script="Jpan" typeface="游ゴシック"/>
         <a:font script="Hang" typeface="맑은 고딕"/>
-        <a:font script="Hans" typeface="宋体"/>
+        <a:font script="Hans" typeface="等线"/>
         <a:font script="Hant" typeface="新細明體"/>
         <a:font script="Arab" typeface="Arial"/>
         <a:font script="Hebr" typeface="Arial"/>
@@ -14286,6 +14394,23 @@
         <a:font script="Viet" typeface="Arial"/>
         <a:font script="Uigh" typeface="Microsoft Uighur"/>
         <a:font script="Geor" typeface="Sylfaen"/>
+        <a:font script="Armn" typeface="Arial"/>
+        <a:font script="Bugi" typeface="Leelawadee UI"/>
+        <a:font script="Bopo" typeface="Microsoft JhengHei"/>
+        <a:font script="Java" typeface="Javanese Text"/>
+        <a:font script="Lisu" typeface="Segoe UI"/>
+        <a:font script="Mymr" typeface="Myanmar Text"/>
+        <a:font script="Nkoo" typeface="Ebrima"/>
+        <a:font script="Olck" typeface="Nirmala UI"/>
+        <a:font script="Osma" typeface="Ebrima"/>
+        <a:font script="Phag" typeface="Phagspa"/>
+        <a:font script="Syrn" typeface="Estrangelo Edessa"/>
+        <a:font script="Syrj" typeface="Estrangelo Edessa"/>
+        <a:font script="Syre" typeface="Estrangelo Edessa"/>
+        <a:font script="Sora" typeface="Nirmala UI"/>
+        <a:font script="Tale" typeface="Microsoft Tai Le"/>
+        <a:font script="Talu" typeface="Microsoft New Tai Lue"/>
+        <a:font script="Tfng" typeface="Ebrima"/>
       </a:minorFont>
     </a:fontScheme>
     <a:fmtScheme name="Office">
@@ -14297,180 +14422,136 @@
           <a:gsLst>
             <a:gs pos="0">
               <a:schemeClr val="phClr">
-                <a:tint val="50000"/>
-                <a:satMod val="300000"/>
+                <a:lumMod val="110000"/>
+                <a:satMod val="105000"/>
+                <a:tint val="67000"/>
               </a:schemeClr>
             </a:gs>
-            <a:gs pos="35000">
+            <a:gs pos="50000">
               <a:schemeClr val="phClr">
-                <a:tint val="37000"/>
-                <a:satMod val="300000"/>
+                <a:lumMod val="105000"/>
+                <a:satMod val="103000"/>
+                <a:tint val="73000"/>
               </a:schemeClr>
             </a:gs>
             <a:gs pos="100000">
               <a:schemeClr val="phClr">
-                <a:tint val="15000"/>
-                <a:satMod val="350000"/>
+                <a:lumMod val="105000"/>
+                <a:satMod val="109000"/>
+                <a:tint val="81000"/>
               </a:schemeClr>
             </a:gs>
           </a:gsLst>
-          <a:lin ang="16200000" scaled="1"/>
+          <a:lin ang="5400000" scaled="0"/>
         </a:gradFill>
         <a:gradFill rotWithShape="1">
           <a:gsLst>
             <a:gs pos="0">
               <a:schemeClr val="phClr">
-                <a:tint val="100000"/>
+                <a:satMod val="103000"/>
+                <a:lumMod val="102000"/>
+                <a:tint val="94000"/>
+              </a:schemeClr>
+            </a:gs>
+            <a:gs pos="50000">
+              <a:schemeClr val="phClr">
+                <a:satMod val="110000"/>
+                <a:lumMod val="100000"/>
                 <a:shade val="100000"/>
-                <a:satMod val="130000"/>
               </a:schemeClr>
             </a:gs>
             <a:gs pos="100000">
               <a:schemeClr val="phClr">
-                <a:tint val="50000"/>
-                <a:shade val="100000"/>
-                <a:satMod val="350000"/>
+                <a:lumMod val="99000"/>
+                <a:satMod val="120000"/>
+                <a:shade val="78000"/>
               </a:schemeClr>
             </a:gs>
           </a:gsLst>
-          <a:lin ang="16200000" scaled="0"/>
+          <a:lin ang="5400000" scaled="0"/>
         </a:gradFill>
       </a:fillStyleLst>
       <a:lnStyleLst>
-        <a:ln w="9525" cap="flat" cmpd="sng" algn="ctr">
+        <a:ln w="12700" cap="flat" cmpd="sng" algn="ctr">
           <a:solidFill>
-            <a:schemeClr val="phClr">
-              <a:shade val="95000"/>
-              <a:satMod val="105000"/>
-            </a:schemeClr>
+            <a:schemeClr val="phClr"/>
           </a:solidFill>
           <a:prstDash val="solid"/>
+          <a:miter lim="800000"/>
+        </a:ln>
+        <a:ln w="19050" cap="flat" cmpd="sng" algn="ctr">
+          <a:solidFill>
+            <a:schemeClr val="phClr"/>
+          </a:solidFill>
+          <a:prstDash val="solid"/>
+          <a:miter lim="800000"/>
         </a:ln>
         <a:ln w="25400" cap="flat" cmpd="sng" algn="ctr">
           <a:solidFill>
             <a:schemeClr val="phClr"/>
           </a:solidFill>
           <a:prstDash val="solid"/>
-        </a:ln>
-        <a:ln w="38100" cap="flat" cmpd="sng" algn="ctr">
-          <a:solidFill>
-            <a:schemeClr val="phClr"/>
-          </a:solidFill>
-          <a:prstDash val="solid"/>
+          <a:miter lim="800000"/>
         </a:ln>
       </a:lnStyleLst>
       <a:effectStyleLst>
         <a:effectStyle>
+          <a:effectLst/>
+        </a:effectStyle>
+        <a:effectStyle>
+          <a:effectLst/>
+        </a:effectStyle>
+        <a:effectStyle>
           <a:effectLst>
-            <a:outerShdw blurRad="40000" dist="20000" dir="5400000" rotWithShape="0">
+            <a:outerShdw blurRad="57150" dist="19050" dir="5400000" algn="ctr" rotWithShape="0">
               <a:srgbClr val="000000">
-                <a:alpha val="38000"/>
+                <a:alpha val="63000"/>
               </a:srgbClr>
             </a:outerShdw>
           </a:effectLst>
-        </a:effectStyle>
-        <a:effectStyle>
-          <a:effectLst>
-            <a:outerShdw blurRad="40000" dist="23000" dir="5400000" rotWithShape="0">
-              <a:srgbClr val="000000">
-                <a:alpha val="35000"/>
-              </a:srgbClr>
-            </a:outerShdw>
-          </a:effectLst>
-        </a:effectStyle>
-        <a:effectStyle>
-          <a:effectLst>
-            <a:outerShdw blurRad="40000" dist="23000" dir="5400000" rotWithShape="0">
-              <a:srgbClr val="000000">
-                <a:alpha val="35000"/>
-              </a:srgbClr>
-            </a:outerShdw>
-          </a:effectLst>
-          <a:scene3d>
-            <a:camera prst="orthographicFront">
-              <a:rot lat="0" lon="0" rev="0"/>
-            </a:camera>
-            <a:lightRig rig="threePt" dir="t">
-              <a:rot lat="0" lon="0" rev="1200000"/>
-            </a:lightRig>
-          </a:scene3d>
-          <a:sp3d>
-            <a:bevelT w="63500" h="25400"/>
-          </a:sp3d>
         </a:effectStyle>
       </a:effectStyleLst>
       <a:bgFillStyleLst>
         <a:solidFill>
           <a:schemeClr val="phClr"/>
         </a:solidFill>
+        <a:solidFill>
+          <a:schemeClr val="phClr">
+            <a:tint val="95000"/>
+            <a:satMod val="170000"/>
+          </a:schemeClr>
+        </a:solidFill>
         <a:gradFill rotWithShape="1">
           <a:gsLst>
             <a:gs pos="0">
               <a:schemeClr val="phClr">
-                <a:tint val="40000"/>
-                <a:satMod val="350000"/>
+                <a:tint val="93000"/>
+                <a:satMod val="150000"/>
+                <a:shade val="98000"/>
+                <a:lumMod val="102000"/>
               </a:schemeClr>
             </a:gs>
-            <a:gs pos="40000">
+            <a:gs pos="50000">
               <a:schemeClr val="phClr">
-                <a:tint val="45000"/>
-                <a:shade val="99000"/>
-                <a:satMod val="350000"/>
+                <a:tint val="98000"/>
+                <a:satMod val="130000"/>
+                <a:shade val="90000"/>
+                <a:lumMod val="103000"/>
               </a:schemeClr>
             </a:gs>
             <a:gs pos="100000">
               <a:schemeClr val="phClr">
-                <a:shade val="20000"/>
-                <a:satMod val="255000"/>
+                <a:shade val="63000"/>
+                <a:satMod val="120000"/>
               </a:schemeClr>
             </a:gs>
           </a:gsLst>
-          <a:path path="circle">
-            <a:fillToRect l="50000" t="-80000" r="50000" b="180000"/>
-          </a:path>
-        </a:gradFill>
-        <a:gradFill rotWithShape="1">
-          <a:gsLst>
-            <a:gs pos="0">
-              <a:schemeClr val="phClr">
-                <a:tint val="80000"/>
-                <a:satMod val="300000"/>
-              </a:schemeClr>
-            </a:gs>
-            <a:gs pos="100000">
-              <a:schemeClr val="phClr">
-                <a:shade val="30000"/>
-                <a:satMod val="200000"/>
-              </a:schemeClr>
-            </a:gs>
-          </a:gsLst>
-          <a:path path="circle">
-            <a:fillToRect l="50000" t="50000" r="50000" b="50000"/>
-          </a:path>
+          <a:lin ang="5400000" scaled="0"/>
         </a:gradFill>
       </a:bgFillStyleLst>
     </a:fmtScheme>
   </a:themeElements>
   <a:objectDefaults>
-    <a:spDef>
-      <a:spPr/>
-      <a:bodyPr/>
-      <a:lstStyle/>
-      <a:style>
-        <a:lnRef idx="1">
-          <a:schemeClr val="accent1"/>
-        </a:lnRef>
-        <a:fillRef idx="3">
-          <a:schemeClr val="accent1"/>
-        </a:fillRef>
-        <a:effectRef idx="2">
-          <a:schemeClr val="accent1"/>
-        </a:effectRef>
-        <a:fontRef idx="minor">
-          <a:schemeClr val="lt1"/>
-        </a:fontRef>
-      </a:style>
-    </a:spDef>
     <a:lnDef>
       <a:spPr/>
       <a:bodyPr/>
@@ -14492,5 +14573,10 @@
     </a:lnDef>
   </a:objectDefaults>
   <a:extraClrSchemeLst/>
+  <a:extLst>
+    <a:ext uri="{05A4C25C-085E-4340-85A3-A5531E510DB2}">
+      <thm15:themeFamily xmlns:thm15="http://schemas.microsoft.com/office/thememl/2012/main" name="Office Theme" id="{2E142A2C-CD16-42D6-873A-C26D2A0506FA}" vid="{1BDDFF52-6CD6-40A5-AB3C-68EB2F1E4D0A}"/>
+    </a:ext>
+  </a:extLst>
 </a:theme>
 </file>